--- a/ゲーム科3年/00_前期/オンラインゲームプログラミングⅠ/04_チャットプログラム(P2P).pptx
+++ b/ゲーム科3年/00_前期/オンラインゲームプログラミングⅠ/04_チャットプログラム(P2P).pptx
@@ -12,6 +12,8 @@
     <p:sldId id="260" r:id="rId6"/>
     <p:sldId id="261" r:id="rId7"/>
     <p:sldId id="262" r:id="rId8"/>
+    <p:sldId id="263" r:id="rId9"/>
+    <p:sldId id="264" r:id="rId10"/>
   </p:sldIdLst>
   <p:sldSz cx="12192000" cy="6858000"/>
   <p:notesSz cx="6858000" cy="9144000"/>
@@ -265,7 +267,7 @@
           <a:p>
             <a:fld id="{E9CC885B-4903-4D54-9A93-00025F12DED9}" type="datetimeFigureOut">
               <a:rPr kumimoji="1" lang="ja-JP" altLang="en-US" smtClean="0"/>
-              <a:t>2025/10/8</a:t>
+              <a:t>2025/10/9</a:t>
             </a:fld>
             <a:endParaRPr kumimoji="1" lang="ja-JP" altLang="en-US"/>
           </a:p>
@@ -495,7 +497,7 @@
           <a:p>
             <a:fld id="{E9CC885B-4903-4D54-9A93-00025F12DED9}" type="datetimeFigureOut">
               <a:rPr kumimoji="1" lang="ja-JP" altLang="en-US" smtClean="0"/>
-              <a:t>2025/10/8</a:t>
+              <a:t>2025/10/9</a:t>
             </a:fld>
             <a:endParaRPr kumimoji="1" lang="ja-JP" altLang="en-US"/>
           </a:p>
@@ -735,7 +737,7 @@
           <a:p>
             <a:fld id="{E9CC885B-4903-4D54-9A93-00025F12DED9}" type="datetimeFigureOut">
               <a:rPr kumimoji="1" lang="ja-JP" altLang="en-US" smtClean="0"/>
-              <a:t>2025/10/8</a:t>
+              <a:t>2025/10/9</a:t>
             </a:fld>
             <a:endParaRPr kumimoji="1" lang="ja-JP" altLang="en-US"/>
           </a:p>
@@ -965,7 +967,7 @@
           <a:p>
             <a:fld id="{E9CC885B-4903-4D54-9A93-00025F12DED9}" type="datetimeFigureOut">
               <a:rPr kumimoji="1" lang="ja-JP" altLang="en-US" smtClean="0"/>
-              <a:t>2025/10/8</a:t>
+              <a:t>2025/10/9</a:t>
             </a:fld>
             <a:endParaRPr kumimoji="1" lang="ja-JP" altLang="en-US"/>
           </a:p>
@@ -1240,7 +1242,7 @@
           <a:p>
             <a:fld id="{E9CC885B-4903-4D54-9A93-00025F12DED9}" type="datetimeFigureOut">
               <a:rPr kumimoji="1" lang="ja-JP" altLang="en-US" smtClean="0"/>
-              <a:t>2025/10/8</a:t>
+              <a:t>2025/10/9</a:t>
             </a:fld>
             <a:endParaRPr kumimoji="1" lang="ja-JP" altLang="en-US"/>
           </a:p>
@@ -1569,7 +1571,7 @@
           <a:p>
             <a:fld id="{E9CC885B-4903-4D54-9A93-00025F12DED9}" type="datetimeFigureOut">
               <a:rPr kumimoji="1" lang="ja-JP" altLang="en-US" smtClean="0"/>
-              <a:t>2025/10/8</a:t>
+              <a:t>2025/10/9</a:t>
             </a:fld>
             <a:endParaRPr kumimoji="1" lang="ja-JP" altLang="en-US"/>
           </a:p>
@@ -2045,7 +2047,7 @@
           <a:p>
             <a:fld id="{E9CC885B-4903-4D54-9A93-00025F12DED9}" type="datetimeFigureOut">
               <a:rPr kumimoji="1" lang="ja-JP" altLang="en-US" smtClean="0"/>
-              <a:t>2025/10/8</a:t>
+              <a:t>2025/10/9</a:t>
             </a:fld>
             <a:endParaRPr kumimoji="1" lang="ja-JP" altLang="en-US"/>
           </a:p>
@@ -2186,7 +2188,7 @@
           <a:p>
             <a:fld id="{E9CC885B-4903-4D54-9A93-00025F12DED9}" type="datetimeFigureOut">
               <a:rPr kumimoji="1" lang="ja-JP" altLang="en-US" smtClean="0"/>
-              <a:t>2025/10/8</a:t>
+              <a:t>2025/10/9</a:t>
             </a:fld>
             <a:endParaRPr kumimoji="1" lang="ja-JP" altLang="en-US"/>
           </a:p>
@@ -2299,7 +2301,7 @@
           <a:p>
             <a:fld id="{E9CC885B-4903-4D54-9A93-00025F12DED9}" type="datetimeFigureOut">
               <a:rPr kumimoji="1" lang="ja-JP" altLang="en-US" smtClean="0"/>
-              <a:t>2025/10/8</a:t>
+              <a:t>2025/10/9</a:t>
             </a:fld>
             <a:endParaRPr kumimoji="1" lang="ja-JP" altLang="en-US"/>
           </a:p>
@@ -2642,7 +2644,7 @@
           <a:p>
             <a:fld id="{E9CC885B-4903-4D54-9A93-00025F12DED9}" type="datetimeFigureOut">
               <a:rPr kumimoji="1" lang="ja-JP" altLang="en-US" smtClean="0"/>
-              <a:t>2025/10/8</a:t>
+              <a:t>2025/10/9</a:t>
             </a:fld>
             <a:endParaRPr kumimoji="1" lang="ja-JP" altLang="en-US"/>
           </a:p>
@@ -2930,7 +2932,7 @@
           <a:p>
             <a:fld id="{E9CC885B-4903-4D54-9A93-00025F12DED9}" type="datetimeFigureOut">
               <a:rPr kumimoji="1" lang="ja-JP" altLang="en-US" smtClean="0"/>
-              <a:t>2025/10/8</a:t>
+              <a:t>2025/10/9</a:t>
             </a:fld>
             <a:endParaRPr kumimoji="1" lang="ja-JP" altLang="en-US"/>
           </a:p>
@@ -3203,7 +3205,7 @@
           <a:p>
             <a:fld id="{E9CC885B-4903-4D54-9A93-00025F12DED9}" type="datetimeFigureOut">
               <a:rPr kumimoji="1" lang="ja-JP" altLang="en-US" smtClean="0"/>
-              <a:t>2025/10/8</a:t>
+              <a:t>2025/10/9</a:t>
             </a:fld>
             <a:endParaRPr kumimoji="1" lang="ja-JP" altLang="en-US"/>
           </a:p>
@@ -3635,7 +3637,7 @@
         <p:spPr>
           <a:xfrm>
             <a:off x="567542" y="491954"/>
-            <a:ext cx="1826141" cy="584775"/>
+            <a:ext cx="5501827" cy="584775"/>
           </a:xfrm>
           <a:prstGeom prst="rect">
             <a:avLst/>
@@ -3650,7 +3652,15 @@
           <a:p>
             <a:r>
               <a:rPr kumimoji="1" lang="ja-JP" altLang="en-US" sz="3200" b="1" u="sng" dirty="0"/>
-              <a:t>通信方式</a:t>
+              <a:t>チャットプログラム（</a:t>
+            </a:r>
+            <a:r>
+              <a:rPr kumimoji="1" lang="en-US" altLang="ja-JP" sz="3200" b="1" u="sng" dirty="0"/>
+              <a:t>P2P</a:t>
+            </a:r>
+            <a:r>
+              <a:rPr kumimoji="1" lang="ja-JP" altLang="en-US" sz="3200" b="1" u="sng" dirty="0"/>
+              <a:t>）</a:t>
             </a:r>
           </a:p>
         </p:txBody>
@@ -3670,7 +3680,7 @@
         <p:spPr>
           <a:xfrm>
             <a:off x="567542" y="1216429"/>
-            <a:ext cx="9417963" cy="1938992"/>
+            <a:ext cx="6611105" cy="461665"/>
           </a:xfrm>
           <a:prstGeom prst="rect">
             <a:avLst/>
@@ -3684,70 +3694,120 @@
           <a:lstStyle/>
           <a:p>
             <a:r>
+              <a:rPr kumimoji="1" lang="en-US" altLang="ja-JP" sz="2400" dirty="0"/>
+              <a:t>P2P</a:t>
+            </a:r>
+            <a:r>
               <a:rPr kumimoji="1" lang="ja-JP" altLang="en-US" sz="2400" dirty="0"/>
-              <a:t>データ通信は、</a:t>
-            </a:r>
-            <a:r>
-              <a:rPr kumimoji="1" lang="ja-JP" altLang="en-US" sz="2400" b="1" dirty="0">
-                <a:solidFill>
-                  <a:srgbClr val="FF0000"/>
-                </a:solidFill>
-              </a:rPr>
-              <a:t>ユーザーに必要なデータが渡らないといけません。</a:t>
-            </a:r>
-            <a:endParaRPr kumimoji="1" lang="en-US" altLang="ja-JP" sz="2400" b="1" dirty="0">
-              <a:solidFill>
-                <a:srgbClr val="FF0000"/>
-              </a:solidFill>
-            </a:endParaRPr>
-          </a:p>
-          <a:p>
-            <a:r>
-              <a:rPr lang="ja-JP" altLang="en-US" sz="2400" dirty="0"/>
-              <a:t>ゲームでは</a:t>
-            </a:r>
-            <a:r>
-              <a:rPr lang="ja-JP" altLang="en-US" sz="2400" b="1" dirty="0">
-                <a:solidFill>
-                  <a:srgbClr val="FF0000"/>
-                </a:solidFill>
-              </a:rPr>
-              <a:t>ユーザーはクライアントを操作</a:t>
-            </a:r>
-            <a:r>
-              <a:rPr lang="ja-JP" altLang="en-US" sz="2400" dirty="0"/>
-              <a:t>しますので、</a:t>
-            </a:r>
-            <a:endParaRPr lang="en-US" altLang="ja-JP" sz="2400" dirty="0"/>
-          </a:p>
-          <a:p>
-            <a:r>
-              <a:rPr kumimoji="1" lang="ja-JP" altLang="en-US" sz="2400" dirty="0"/>
-              <a:t>ゲームの情報をクライアントに伝えなくてはいけません。</a:t>
+              <a:t>方式でチャットプログラムを練習します。</a:t>
             </a:r>
             <a:endParaRPr kumimoji="1" lang="en-US" altLang="ja-JP" sz="2400" dirty="0"/>
           </a:p>
-          <a:p>
-            <a:endParaRPr lang="en-US" altLang="ja-JP" sz="2400" dirty="0"/>
-          </a:p>
-          <a:p>
-            <a:r>
-              <a:rPr kumimoji="1" lang="en-US" altLang="ja-JP" sz="2400" dirty="0"/>
-              <a:t>※</a:t>
-            </a:r>
-            <a:r>
-              <a:rPr kumimoji="1" lang="ja-JP" altLang="en-US" sz="2400" dirty="0"/>
-              <a:t>「</a:t>
-            </a:r>
-            <a:r>
-              <a:rPr kumimoji="1" lang="en-US" altLang="ja-JP" sz="2400" dirty="0"/>
-              <a:t>00_</a:t>
-            </a:r>
-            <a:r>
-              <a:rPr kumimoji="1" lang="ja-JP" altLang="en-US" sz="2400" dirty="0"/>
-              <a:t>オンラインゲームの仕組み」を見直してみよう</a:t>
-            </a:r>
-            <a:endParaRPr kumimoji="1" lang="en-US" altLang="ja-JP" sz="2400" dirty="0"/>
+        </p:txBody>
+      </p:sp>
+      <p:pic>
+        <p:nvPicPr>
+          <p:cNvPr id="7" name="図 6">
+            <a:extLst>
+              <a:ext uri="{FF2B5EF4-FFF2-40B4-BE49-F238E27FC236}">
+                <a16:creationId xmlns:a16="http://schemas.microsoft.com/office/drawing/2014/main" id="{4E0D99BF-F15F-4887-BE6F-C12A54A5FECE}"/>
+              </a:ext>
+            </a:extLst>
+          </p:cNvPr>
+          <p:cNvPicPr>
+            <a:picLocks noChangeAspect="1"/>
+          </p:cNvPicPr>
+          <p:nvPr/>
+        </p:nvPicPr>
+        <p:blipFill>
+          <a:blip r:embed="rId2"/>
+          <a:stretch>
+            <a:fillRect/>
+          </a:stretch>
+        </p:blipFill>
+        <p:spPr>
+          <a:xfrm>
+            <a:off x="5811618" y="1730653"/>
+            <a:ext cx="2991723" cy="2178641"/>
+          </a:xfrm>
+          <a:prstGeom prst="rect">
+            <a:avLst/>
+          </a:prstGeom>
+        </p:spPr>
+      </p:pic>
+      <p:pic>
+        <p:nvPicPr>
+          <p:cNvPr id="9" name="図 8">
+            <a:extLst>
+              <a:ext uri="{FF2B5EF4-FFF2-40B4-BE49-F238E27FC236}">
+                <a16:creationId xmlns:a16="http://schemas.microsoft.com/office/drawing/2014/main" id="{B91D1093-5D51-4CA1-A50C-E92A9F7763E2}"/>
+              </a:ext>
+            </a:extLst>
+          </p:cNvPr>
+          <p:cNvPicPr>
+            <a:picLocks noChangeAspect="1"/>
+          </p:cNvPicPr>
+          <p:nvPr/>
+        </p:nvPicPr>
+        <p:blipFill>
+          <a:blip r:embed="rId3"/>
+          <a:stretch>
+            <a:fillRect/>
+          </a:stretch>
+        </p:blipFill>
+        <p:spPr>
+          <a:xfrm>
+            <a:off x="567542" y="1813312"/>
+            <a:ext cx="2686425" cy="2095792"/>
+          </a:xfrm>
+          <a:prstGeom prst="rect">
+            <a:avLst/>
+          </a:prstGeom>
+        </p:spPr>
+      </p:pic>
+      <p:sp>
+        <p:nvSpPr>
+          <p:cNvPr id="10" name="矢印: 左右 9">
+            <a:extLst>
+              <a:ext uri="{FF2B5EF4-FFF2-40B4-BE49-F238E27FC236}">
+                <a16:creationId xmlns:a16="http://schemas.microsoft.com/office/drawing/2014/main" id="{7DC8CC3B-DD61-4DEF-94C0-CE67D1F32A85}"/>
+              </a:ext>
+            </a:extLst>
+          </p:cNvPr>
+          <p:cNvSpPr/>
+          <p:nvPr/>
+        </p:nvSpPr>
+        <p:spPr>
+          <a:xfrm>
+            <a:off x="3390148" y="2556035"/>
+            <a:ext cx="2260478" cy="583090"/>
+          </a:xfrm>
+          <a:prstGeom prst="leftRightArrow">
+            <a:avLst/>
+          </a:prstGeom>
+        </p:spPr>
+        <p:style>
+          <a:lnRef idx="2">
+            <a:schemeClr val="accent1">
+              <a:shade val="50000"/>
+            </a:schemeClr>
+          </a:lnRef>
+          <a:fillRef idx="1">
+            <a:schemeClr val="accent1"/>
+          </a:fillRef>
+          <a:effectRef idx="0">
+            <a:schemeClr val="accent1"/>
+          </a:effectRef>
+          <a:fontRef idx="minor">
+            <a:schemeClr val="lt1"/>
+          </a:fontRef>
+        </p:style>
+        <p:txBody>
+          <a:bodyPr rtlCol="0" anchor="ctr"/>
+          <a:lstStyle/>
+          <a:p>
+            <a:pPr algn="ctr"/>
+            <a:endParaRPr kumimoji="1" lang="ja-JP" altLang="en-US" b="1" dirty="0"/>
           </a:p>
         </p:txBody>
       </p:sp>
@@ -3796,7 +3856,7 @@
         <p:spPr>
           <a:xfrm>
             <a:off x="567542" y="491954"/>
-            <a:ext cx="1826141" cy="584775"/>
+            <a:ext cx="5501827" cy="584775"/>
           </a:xfrm>
           <a:prstGeom prst="rect">
             <a:avLst/>
@@ -3811,7 +3871,15 @@
           <a:p>
             <a:r>
               <a:rPr kumimoji="1" lang="ja-JP" altLang="en-US" sz="3200" b="1" u="sng" dirty="0"/>
-              <a:t>通信方式</a:t>
+              <a:t>チャットプログラム（</a:t>
+            </a:r>
+            <a:r>
+              <a:rPr kumimoji="1" lang="en-US" altLang="ja-JP" sz="3200" b="1" u="sng" dirty="0"/>
+              <a:t>P2P</a:t>
+            </a:r>
+            <a:r>
+              <a:rPr kumimoji="1" lang="ja-JP" altLang="en-US" sz="3200" b="1" u="sng" dirty="0"/>
+              <a:t>）</a:t>
             </a:r>
           </a:p>
         </p:txBody>
@@ -3831,7 +3899,7 @@
         <p:spPr>
           <a:xfrm>
             <a:off x="567542" y="1216429"/>
-            <a:ext cx="11128367" cy="2677656"/>
+            <a:ext cx="8802410" cy="830997"/>
           </a:xfrm>
           <a:prstGeom prst="rect">
             <a:avLst/>
@@ -3846,20 +3914,145 @@
           <a:p>
             <a:r>
               <a:rPr kumimoji="1" lang="ja-JP" altLang="en-US" sz="2400" dirty="0"/>
-              <a:t>クライアント間でデータを通信、共有する方法は大きく分けて</a:t>
-            </a:r>
+              <a:t>通信を確立するためには、</a:t>
+            </a:r>
+            <a:r>
+              <a:rPr kumimoji="1" lang="ja-JP" altLang="en-US" sz="2400" b="1" dirty="0">
+                <a:solidFill>
+                  <a:srgbClr val="FF0000"/>
+                </a:solidFill>
+              </a:rPr>
+              <a:t>誰かが受付をしないといけません。</a:t>
+            </a:r>
+            <a:endParaRPr kumimoji="1" lang="en-US" altLang="ja-JP" sz="2400" b="1" dirty="0">
+              <a:solidFill>
+                <a:srgbClr val="FF0000"/>
+              </a:solidFill>
+            </a:endParaRPr>
+          </a:p>
+          <a:p>
+            <a:r>
+              <a:rPr lang="ja-JP" altLang="en-US" sz="2400" dirty="0"/>
+              <a:t>接続の練習では</a:t>
+            </a:r>
+            <a:r>
+              <a:rPr lang="en-US" altLang="ja-JP" sz="2400" b="1" dirty="0">
+                <a:solidFill>
+                  <a:srgbClr val="00B050"/>
+                </a:solidFill>
+              </a:rPr>
+              <a:t>Server</a:t>
+            </a:r>
+            <a:r>
+              <a:rPr lang="ja-JP" altLang="en-US" sz="2400" b="1" dirty="0">
+                <a:solidFill>
+                  <a:srgbClr val="00B050"/>
+                </a:solidFill>
+              </a:rPr>
+              <a:t>クラス</a:t>
+            </a:r>
+            <a:r>
+              <a:rPr lang="ja-JP" altLang="en-US" sz="2400" dirty="0"/>
+              <a:t>にさせていました。</a:t>
+            </a:r>
+            <a:endParaRPr kumimoji="1" lang="en-US" altLang="ja-JP" sz="2400" dirty="0"/>
+          </a:p>
+        </p:txBody>
+      </p:sp>
+      <p:pic>
+        <p:nvPicPr>
+          <p:cNvPr id="3" name="図 2">
+            <a:extLst>
+              <a:ext uri="{FF2B5EF4-FFF2-40B4-BE49-F238E27FC236}">
+                <a16:creationId xmlns:a16="http://schemas.microsoft.com/office/drawing/2014/main" id="{FB419E0F-021E-492E-B934-C176838A31DB}"/>
+              </a:ext>
+            </a:extLst>
+          </p:cNvPr>
+          <p:cNvPicPr>
+            <a:picLocks noChangeAspect="1"/>
+          </p:cNvPicPr>
+          <p:nvPr/>
+        </p:nvPicPr>
+        <p:blipFill>
+          <a:blip r:embed="rId2"/>
+          <a:stretch>
+            <a:fillRect/>
+          </a:stretch>
+        </p:blipFill>
+        <p:spPr>
+          <a:xfrm>
+            <a:off x="567542" y="2190577"/>
+            <a:ext cx="5953956" cy="1238423"/>
+          </a:xfrm>
+          <a:prstGeom prst="rect">
+            <a:avLst/>
+          </a:prstGeom>
+        </p:spPr>
+      </p:pic>
+      <p:sp>
+        <p:nvSpPr>
+          <p:cNvPr id="11" name="テキスト ボックス 10">
+            <a:extLst>
+              <a:ext uri="{FF2B5EF4-FFF2-40B4-BE49-F238E27FC236}">
+                <a16:creationId xmlns:a16="http://schemas.microsoft.com/office/drawing/2014/main" id="{92782E54-D43C-4163-920E-EB47FD385F96}"/>
+              </a:ext>
+            </a:extLst>
+          </p:cNvPr>
+          <p:cNvSpPr txBox="1"/>
+          <p:nvPr/>
+        </p:nvSpPr>
+        <p:spPr>
+          <a:xfrm>
+            <a:off x="567542" y="3572151"/>
+            <a:ext cx="7879080" cy="1200329"/>
+          </a:xfrm>
+          <a:prstGeom prst="rect">
+            <a:avLst/>
+          </a:prstGeom>
+          <a:noFill/>
+        </p:spPr>
+        <p:txBody>
+          <a:bodyPr wrap="none" rtlCol="0">
+            <a:spAutoFit/>
+          </a:bodyPr>
+          <a:lstStyle/>
+          <a:p>
             <a:r>
               <a:rPr kumimoji="1" lang="en-US" altLang="ja-JP" sz="2400" dirty="0"/>
-              <a:t>2</a:t>
+              <a:t>P2P</a:t>
             </a:r>
             <a:r>
               <a:rPr kumimoji="1" lang="ja-JP" altLang="en-US" sz="2400" dirty="0"/>
-              <a:t>種類あります。</a:t>
+              <a:t>には</a:t>
+            </a:r>
+            <a:r>
+              <a:rPr kumimoji="1" lang="ja-JP" altLang="en-US" sz="2400" b="1" dirty="0">
+                <a:solidFill>
+                  <a:srgbClr val="FF0000"/>
+                </a:solidFill>
+              </a:rPr>
+              <a:t>サーバーは無い</a:t>
+            </a:r>
+            <a:r>
+              <a:rPr kumimoji="1" lang="ja-JP" altLang="en-US" sz="2400" dirty="0"/>
+              <a:t>ため、</a:t>
             </a:r>
             <a:endParaRPr kumimoji="1" lang="en-US" altLang="ja-JP" sz="2400" dirty="0"/>
           </a:p>
           <a:p>
-            <a:endParaRPr lang="en-US" altLang="ja-JP" sz="2400" dirty="0"/>
+            <a:r>
+              <a:rPr kumimoji="1" lang="ja-JP" altLang="en-US" sz="2400" b="1" dirty="0">
+                <a:solidFill>
+                  <a:srgbClr val="FF0000"/>
+                </a:solidFill>
+              </a:rPr>
+              <a:t>通信する前に、受付をするか、後から参加をするのか、</a:t>
+            </a:r>
+            <a:endParaRPr kumimoji="1" lang="en-US" altLang="ja-JP" sz="2400" b="1" dirty="0">
+              <a:solidFill>
+                <a:srgbClr val="FF0000"/>
+              </a:solidFill>
+            </a:endParaRPr>
           </a:p>
           <a:p>
             <a:r>
@@ -3868,38 +4061,7 @@
                   <a:srgbClr val="FF0000"/>
                 </a:solidFill>
               </a:rPr>
-              <a:t>・ピアツーピア方式（</a:t>
-            </a:r>
-            <a:r>
-              <a:rPr lang="en-US" altLang="ja-JP" sz="2400" b="1" dirty="0">
-                <a:solidFill>
-                  <a:srgbClr val="FF0000"/>
-                </a:solidFill>
-              </a:rPr>
-              <a:t>P2P</a:t>
-            </a:r>
-            <a:r>
-              <a:rPr lang="ja-JP" altLang="en-US" sz="2400" b="1" dirty="0">
-                <a:solidFill>
-                  <a:srgbClr val="FF0000"/>
-                </a:solidFill>
-              </a:rPr>
-              <a:t>）</a:t>
-            </a:r>
-            <a:endParaRPr lang="en-US" altLang="ja-JP" sz="2400" b="1" dirty="0">
-              <a:solidFill>
-                <a:srgbClr val="FF0000"/>
-              </a:solidFill>
-            </a:endParaRPr>
-          </a:p>
-          <a:p>
-            <a:r>
-              <a:rPr kumimoji="1" lang="ja-JP" altLang="en-US" sz="2400" b="1" dirty="0">
-                <a:solidFill>
-                  <a:srgbClr val="FF0000"/>
-                </a:solidFill>
-              </a:rPr>
-              <a:t>・クライアントサーバー方式</a:t>
+              <a:t>どちらかを決めなければいけません。</a:t>
             </a:r>
             <a:endParaRPr kumimoji="1" lang="en-US" altLang="ja-JP" sz="2400" b="1" dirty="0">
               <a:solidFill>
@@ -3907,41 +4069,12 @@
               </a:solidFill>
             </a:endParaRPr>
           </a:p>
-          <a:p>
-            <a:endParaRPr lang="en-US" altLang="ja-JP" sz="2400" dirty="0"/>
-          </a:p>
-          <a:p>
-            <a:r>
-              <a:rPr kumimoji="1" lang="ja-JP" altLang="en-US" sz="2400" dirty="0"/>
-              <a:t>実際のゲームではこれらの方式を軸に</a:t>
-            </a:r>
-            <a:r>
-              <a:rPr kumimoji="1" lang="ja-JP" altLang="en-US" sz="2400" b="1" dirty="0">
-                <a:solidFill>
-                  <a:srgbClr val="FF0000"/>
-                </a:solidFill>
-              </a:rPr>
-              <a:t>様々な手法に派生</a:t>
-            </a:r>
-            <a:r>
-              <a:rPr kumimoji="1" lang="ja-JP" altLang="en-US" sz="2400" dirty="0"/>
-              <a:t>しています。</a:t>
-            </a:r>
-            <a:endParaRPr kumimoji="1" lang="en-US" altLang="ja-JP" sz="2400" dirty="0"/>
-          </a:p>
-          <a:p>
-            <a:r>
-              <a:rPr lang="ja-JP" altLang="en-US" sz="2400" dirty="0"/>
-              <a:t>まずは軸となる方式を学びましょう。</a:t>
-            </a:r>
-            <a:endParaRPr kumimoji="1" lang="en-US" altLang="ja-JP" sz="2400" dirty="0"/>
-          </a:p>
         </p:txBody>
       </p:sp>
     </p:spTree>
     <p:extLst>
       <p:ext uri="{BB962C8B-B14F-4D97-AF65-F5344CB8AC3E}">
-        <p14:creationId xmlns:p14="http://schemas.microsoft.com/office/powerpoint/2010/main" val="3529048355"/>
+        <p14:creationId xmlns:p14="http://schemas.microsoft.com/office/powerpoint/2010/main" val="1350809067"/>
       </p:ext>
     </p:extLst>
   </p:cSld>
@@ -3983,7 +4116,7 @@
         <p:spPr>
           <a:xfrm>
             <a:off x="567542" y="491954"/>
-            <a:ext cx="2746265" cy="584775"/>
+            <a:ext cx="5501827" cy="584775"/>
           </a:xfrm>
           <a:prstGeom prst="rect">
             <a:avLst/>
@@ -3998,13 +4131,16 @@
           <a:p>
             <a:r>
               <a:rPr kumimoji="1" lang="ja-JP" altLang="en-US" sz="3200" b="1" u="sng" dirty="0"/>
-              <a:t>通信方式 </a:t>
+              <a:t>チャットプログラム（</a:t>
             </a:r>
             <a:r>
               <a:rPr kumimoji="1" lang="en-US" altLang="ja-JP" sz="3200" b="1" u="sng" dirty="0"/>
               <a:t>P2P</a:t>
             </a:r>
-            <a:endParaRPr kumimoji="1" lang="ja-JP" altLang="en-US" sz="3200" b="1" u="sng" dirty="0"/>
+            <a:r>
+              <a:rPr kumimoji="1" lang="ja-JP" altLang="en-US" sz="3200" b="1" u="sng" dirty="0"/>
+              <a:t>）</a:t>
+            </a:r>
           </a:p>
         </p:txBody>
       </p:sp>
@@ -4023,7 +4159,7 @@
         <p:spPr>
           <a:xfrm>
             <a:off x="567542" y="1216429"/>
-            <a:ext cx="10756471" cy="1200329"/>
+            <a:ext cx="8802410" cy="830997"/>
           </a:xfrm>
           <a:prstGeom prst="rect">
             <a:avLst/>
@@ -4036,595 +4172,103 @@
           </a:bodyPr>
           <a:lstStyle/>
           <a:p>
+            <a:r>
+              <a:rPr kumimoji="1" lang="ja-JP" altLang="en-US" sz="2400" dirty="0"/>
+              <a:t>今回は起動時にどちらにするかを入力させます。</a:t>
+            </a:r>
+            <a:endParaRPr kumimoji="1" lang="en-US" altLang="ja-JP" sz="2400" dirty="0"/>
+          </a:p>
+          <a:p>
+            <a:r>
+              <a:rPr lang="ja-JP" altLang="en-US" sz="2400" dirty="0"/>
+              <a:t>受付する方をホスト、参加する方をクライアントと呼びます。</a:t>
+            </a:r>
+            <a:endParaRPr kumimoji="1" lang="en-US" altLang="ja-JP" sz="2400" dirty="0"/>
+          </a:p>
+        </p:txBody>
+      </p:sp>
+      <p:pic>
+        <p:nvPicPr>
+          <p:cNvPr id="5" name="図 4">
+            <a:extLst>
+              <a:ext uri="{FF2B5EF4-FFF2-40B4-BE49-F238E27FC236}">
+                <a16:creationId xmlns:a16="http://schemas.microsoft.com/office/drawing/2014/main" id="{96914EC2-92B6-4A74-B17F-D18AC38E1487}"/>
+              </a:ext>
+            </a:extLst>
+          </p:cNvPr>
+          <p:cNvPicPr>
+            <a:picLocks noChangeAspect="1"/>
+          </p:cNvPicPr>
+          <p:nvPr/>
+        </p:nvPicPr>
+        <p:blipFill>
+          <a:blip r:embed="rId2"/>
+          <a:stretch>
+            <a:fillRect/>
+          </a:stretch>
+        </p:blipFill>
+        <p:spPr>
+          <a:xfrm>
+            <a:off x="567542" y="2187126"/>
+            <a:ext cx="6996548" cy="2815180"/>
+          </a:xfrm>
+          <a:prstGeom prst="rect">
+            <a:avLst/>
+          </a:prstGeom>
+        </p:spPr>
+      </p:pic>
+      <p:sp>
+        <p:nvSpPr>
+          <p:cNvPr id="8" name="テキスト ボックス 7">
+            <a:extLst>
+              <a:ext uri="{FF2B5EF4-FFF2-40B4-BE49-F238E27FC236}">
+                <a16:creationId xmlns:a16="http://schemas.microsoft.com/office/drawing/2014/main" id="{6C1BD29D-748B-4D26-A4FD-F614BED05B09}"/>
+              </a:ext>
+            </a:extLst>
+          </p:cNvPr>
+          <p:cNvSpPr txBox="1"/>
+          <p:nvPr/>
+        </p:nvSpPr>
+        <p:spPr>
+          <a:xfrm>
+            <a:off x="567542" y="5142006"/>
+            <a:ext cx="4956806" cy="461665"/>
+          </a:xfrm>
+          <a:prstGeom prst="rect">
+            <a:avLst/>
+          </a:prstGeom>
+          <a:noFill/>
+        </p:spPr>
+        <p:txBody>
+          <a:bodyPr wrap="none" rtlCol="0">
+            <a:spAutoFit/>
+          </a:bodyPr>
+          <a:lstStyle/>
+          <a:p>
+            <a:r>
+              <a:rPr kumimoji="1" lang="en-US" altLang="ja-JP" sz="2400" dirty="0"/>
+              <a:t>※</a:t>
+            </a:r>
             <a:r>
               <a:rPr kumimoji="1" lang="en-US" altLang="ja-JP" sz="2400" b="1" dirty="0">
                 <a:solidFill>
                   <a:srgbClr val="FF0000"/>
                 </a:solidFill>
               </a:rPr>
-              <a:t>P2P</a:t>
-            </a:r>
-            <a:r>
-              <a:rPr kumimoji="1" lang="ja-JP" altLang="en-US" sz="2400" b="1" dirty="0">
-                <a:solidFill>
-                  <a:srgbClr val="FF0000"/>
-                </a:solidFill>
-              </a:rPr>
-              <a:t>方式</a:t>
+              <a:t>Main.cpp</a:t>
             </a:r>
             <a:r>
               <a:rPr kumimoji="1" lang="ja-JP" altLang="en-US" sz="2400" dirty="0"/>
-              <a:t>は単純に</a:t>
-            </a:r>
-            <a:r>
-              <a:rPr kumimoji="1" lang="ja-JP" altLang="en-US" sz="2400" b="1" dirty="0">
-                <a:solidFill>
-                  <a:srgbClr val="FF0000"/>
-                </a:solidFill>
-              </a:rPr>
-              <a:t>お互いでデータを送りあう方式</a:t>
-            </a:r>
-            <a:r>
-              <a:rPr kumimoji="1" lang="ja-JP" altLang="en-US" sz="2400" dirty="0"/>
-              <a:t>です。</a:t>
+              <a:t>を見ておきましょう。</a:t>
             </a:r>
             <a:endParaRPr kumimoji="1" lang="en-US" altLang="ja-JP" sz="2400" dirty="0"/>
-          </a:p>
-          <a:p>
-            <a:r>
-              <a:rPr kumimoji="1" lang="ja-JP" altLang="en-US" sz="2400" dirty="0"/>
-              <a:t>サーバーという概念は無く、</a:t>
-            </a:r>
-            <a:r>
-              <a:rPr lang="ja-JP" altLang="en-US" sz="2400" dirty="0"/>
-              <a:t>お互いがデータを送信、受信します。</a:t>
-            </a:r>
-            <a:endParaRPr lang="en-US" altLang="ja-JP" sz="2400" dirty="0"/>
-          </a:p>
-          <a:p>
-            <a:r>
-              <a:rPr lang="ja-JP" altLang="en-US" sz="2400" b="1" dirty="0">
-                <a:solidFill>
-                  <a:srgbClr val="FF0000"/>
-                </a:solidFill>
-              </a:rPr>
-              <a:t>ローカル通信対戦や小規模な１</a:t>
-            </a:r>
-            <a:r>
-              <a:rPr lang="en-US" altLang="ja-JP" sz="2400" b="1" dirty="0">
-                <a:solidFill>
-                  <a:srgbClr val="FF0000"/>
-                </a:solidFill>
-              </a:rPr>
-              <a:t>VS</a:t>
-            </a:r>
-            <a:r>
-              <a:rPr lang="ja-JP" altLang="en-US" sz="2400" b="1" dirty="0">
-                <a:solidFill>
-                  <a:srgbClr val="FF0000"/>
-                </a:solidFill>
-              </a:rPr>
-              <a:t>１オンライン対戦ゲーム</a:t>
-            </a:r>
-            <a:r>
-              <a:rPr lang="ja-JP" altLang="en-US" sz="2400" dirty="0"/>
-              <a:t>で採用されます。</a:t>
-            </a:r>
-            <a:endParaRPr lang="en-US" altLang="ja-JP" sz="2400" dirty="0"/>
-          </a:p>
-        </p:txBody>
-      </p:sp>
-      <p:sp>
-        <p:nvSpPr>
-          <p:cNvPr id="5" name="二等辺三角形 4">
-            <a:extLst>
-              <a:ext uri="{FF2B5EF4-FFF2-40B4-BE49-F238E27FC236}">
-                <a16:creationId xmlns:a16="http://schemas.microsoft.com/office/drawing/2014/main" id="{F8AE2564-9C06-4CC7-BBA5-01BEBFA50536}"/>
-              </a:ext>
-            </a:extLst>
-          </p:cNvPr>
-          <p:cNvSpPr/>
-          <p:nvPr/>
-        </p:nvSpPr>
-        <p:spPr>
-          <a:xfrm>
-            <a:off x="2351518" y="4610951"/>
-            <a:ext cx="699247" cy="555812"/>
-          </a:xfrm>
-          <a:prstGeom prst="triangle">
-            <a:avLst/>
-          </a:prstGeom>
-        </p:spPr>
-        <p:style>
-          <a:lnRef idx="2">
-            <a:schemeClr val="accent1">
-              <a:shade val="50000"/>
-            </a:schemeClr>
-          </a:lnRef>
-          <a:fillRef idx="1">
-            <a:schemeClr val="accent1"/>
-          </a:fillRef>
-          <a:effectRef idx="0">
-            <a:schemeClr val="accent1"/>
-          </a:effectRef>
-          <a:fontRef idx="minor">
-            <a:schemeClr val="lt1"/>
-          </a:fontRef>
-        </p:style>
-        <p:txBody>
-          <a:bodyPr rtlCol="0" anchor="ctr"/>
-          <a:lstStyle/>
-          <a:p>
-            <a:pPr algn="ctr"/>
-            <a:endParaRPr kumimoji="1" lang="ja-JP" altLang="en-US"/>
-          </a:p>
-        </p:txBody>
-      </p:sp>
-      <p:sp>
-        <p:nvSpPr>
-          <p:cNvPr id="7" name="正方形/長方形 6">
-            <a:extLst>
-              <a:ext uri="{FF2B5EF4-FFF2-40B4-BE49-F238E27FC236}">
-                <a16:creationId xmlns:a16="http://schemas.microsoft.com/office/drawing/2014/main" id="{DA6568F9-232A-4A7E-83DB-3FD8852BF368}"/>
-              </a:ext>
-            </a:extLst>
-          </p:cNvPr>
-          <p:cNvSpPr/>
-          <p:nvPr/>
-        </p:nvSpPr>
-        <p:spPr>
-          <a:xfrm>
-            <a:off x="1831564" y="3517257"/>
-            <a:ext cx="1748118" cy="1093694"/>
-          </a:xfrm>
-          <a:prstGeom prst="rect">
-            <a:avLst/>
-          </a:prstGeom>
-          <a:noFill/>
-        </p:spPr>
-        <p:style>
-          <a:lnRef idx="2">
-            <a:schemeClr val="accent1">
-              <a:shade val="50000"/>
-            </a:schemeClr>
-          </a:lnRef>
-          <a:fillRef idx="1">
-            <a:schemeClr val="accent1"/>
-          </a:fillRef>
-          <a:effectRef idx="0">
-            <a:schemeClr val="accent1"/>
-          </a:effectRef>
-          <a:fontRef idx="minor">
-            <a:schemeClr val="lt1"/>
-          </a:fontRef>
-        </p:style>
-        <p:txBody>
-          <a:bodyPr rtlCol="0" anchor="ctr"/>
-          <a:lstStyle/>
-          <a:p>
-            <a:pPr algn="ctr"/>
-            <a:endParaRPr kumimoji="1" lang="ja-JP" altLang="en-US"/>
-          </a:p>
-        </p:txBody>
-      </p:sp>
-      <p:sp>
-        <p:nvSpPr>
-          <p:cNvPr id="8" name="スマイル 7">
-            <a:extLst>
-              <a:ext uri="{FF2B5EF4-FFF2-40B4-BE49-F238E27FC236}">
-                <a16:creationId xmlns:a16="http://schemas.microsoft.com/office/drawing/2014/main" id="{B19C6A8D-2B38-4F13-B3C4-30CF59E67DB2}"/>
-              </a:ext>
-            </a:extLst>
-          </p:cNvPr>
-          <p:cNvSpPr/>
-          <p:nvPr/>
-        </p:nvSpPr>
-        <p:spPr>
-          <a:xfrm>
-            <a:off x="2208082" y="3708910"/>
-            <a:ext cx="251011" cy="236796"/>
-          </a:xfrm>
-          <a:prstGeom prst="smileyFace">
-            <a:avLst/>
-          </a:prstGeom>
-        </p:spPr>
-        <p:style>
-          <a:lnRef idx="2">
-            <a:schemeClr val="accent1">
-              <a:shade val="50000"/>
-            </a:schemeClr>
-          </a:lnRef>
-          <a:fillRef idx="1">
-            <a:schemeClr val="accent1"/>
-          </a:fillRef>
-          <a:effectRef idx="0">
-            <a:schemeClr val="accent1"/>
-          </a:effectRef>
-          <a:fontRef idx="minor">
-            <a:schemeClr val="lt1"/>
-          </a:fontRef>
-        </p:style>
-        <p:txBody>
-          <a:bodyPr rtlCol="0" anchor="ctr"/>
-          <a:lstStyle/>
-          <a:p>
-            <a:pPr algn="ctr"/>
-            <a:endParaRPr kumimoji="1" lang="ja-JP" altLang="en-US"/>
-          </a:p>
-        </p:txBody>
-      </p:sp>
-      <p:sp>
-        <p:nvSpPr>
-          <p:cNvPr id="9" name="スマイル 8">
-            <a:extLst>
-              <a:ext uri="{FF2B5EF4-FFF2-40B4-BE49-F238E27FC236}">
-                <a16:creationId xmlns:a16="http://schemas.microsoft.com/office/drawing/2014/main" id="{D4382F14-BE54-462F-BACF-8F1B52492FE6}"/>
-              </a:ext>
-            </a:extLst>
-          </p:cNvPr>
-          <p:cNvSpPr/>
-          <p:nvPr/>
-        </p:nvSpPr>
-        <p:spPr>
-          <a:xfrm>
-            <a:off x="2938706" y="3921278"/>
-            <a:ext cx="251011" cy="236796"/>
-          </a:xfrm>
-          <a:prstGeom prst="smileyFace">
-            <a:avLst/>
-          </a:prstGeom>
-          <a:solidFill>
-            <a:srgbClr val="FFFF00"/>
-          </a:solidFill>
-          <a:ln>
-            <a:solidFill>
-              <a:schemeClr val="tx1"/>
-            </a:solidFill>
-          </a:ln>
-        </p:spPr>
-        <p:style>
-          <a:lnRef idx="2">
-            <a:schemeClr val="accent1">
-              <a:shade val="50000"/>
-            </a:schemeClr>
-          </a:lnRef>
-          <a:fillRef idx="1">
-            <a:schemeClr val="accent1"/>
-          </a:fillRef>
-          <a:effectRef idx="0">
-            <a:schemeClr val="accent1"/>
-          </a:effectRef>
-          <a:fontRef idx="minor">
-            <a:schemeClr val="lt1"/>
-          </a:fontRef>
-        </p:style>
-        <p:txBody>
-          <a:bodyPr rtlCol="0" anchor="ctr"/>
-          <a:lstStyle/>
-          <a:p>
-            <a:pPr algn="ctr"/>
-            <a:endParaRPr kumimoji="1" lang="ja-JP" altLang="en-US"/>
-          </a:p>
-        </p:txBody>
-      </p:sp>
-      <p:sp>
-        <p:nvSpPr>
-          <p:cNvPr id="10" name="二等辺三角形 9">
-            <a:extLst>
-              <a:ext uri="{FF2B5EF4-FFF2-40B4-BE49-F238E27FC236}">
-                <a16:creationId xmlns:a16="http://schemas.microsoft.com/office/drawing/2014/main" id="{D082CFF6-6A9A-43C3-A36D-897424BB5E8F}"/>
-              </a:ext>
-            </a:extLst>
-          </p:cNvPr>
-          <p:cNvSpPr/>
-          <p:nvPr/>
-        </p:nvSpPr>
-        <p:spPr>
-          <a:xfrm>
-            <a:off x="6764919" y="4547826"/>
-            <a:ext cx="699247" cy="555812"/>
-          </a:xfrm>
-          <a:prstGeom prst="triangle">
-            <a:avLst/>
-          </a:prstGeom>
-        </p:spPr>
-        <p:style>
-          <a:lnRef idx="2">
-            <a:schemeClr val="accent1">
-              <a:shade val="50000"/>
-            </a:schemeClr>
-          </a:lnRef>
-          <a:fillRef idx="1">
-            <a:schemeClr val="accent1"/>
-          </a:fillRef>
-          <a:effectRef idx="0">
-            <a:schemeClr val="accent1"/>
-          </a:effectRef>
-          <a:fontRef idx="minor">
-            <a:schemeClr val="lt1"/>
-          </a:fontRef>
-        </p:style>
-        <p:txBody>
-          <a:bodyPr rtlCol="0" anchor="ctr"/>
-          <a:lstStyle/>
-          <a:p>
-            <a:pPr algn="ctr"/>
-            <a:endParaRPr kumimoji="1" lang="ja-JP" altLang="en-US"/>
-          </a:p>
-        </p:txBody>
-      </p:sp>
-      <p:sp>
-        <p:nvSpPr>
-          <p:cNvPr id="11" name="正方形/長方形 10">
-            <a:extLst>
-              <a:ext uri="{FF2B5EF4-FFF2-40B4-BE49-F238E27FC236}">
-                <a16:creationId xmlns:a16="http://schemas.microsoft.com/office/drawing/2014/main" id="{BAC039B1-C514-4297-AD9D-0BFD75C854C8}"/>
-              </a:ext>
-            </a:extLst>
-          </p:cNvPr>
-          <p:cNvSpPr/>
-          <p:nvPr/>
-        </p:nvSpPr>
-        <p:spPr>
-          <a:xfrm>
-            <a:off x="6244965" y="3454132"/>
-            <a:ext cx="1748118" cy="1093694"/>
-          </a:xfrm>
-          <a:prstGeom prst="rect">
-            <a:avLst/>
-          </a:prstGeom>
-          <a:noFill/>
-        </p:spPr>
-        <p:style>
-          <a:lnRef idx="2">
-            <a:schemeClr val="accent1">
-              <a:shade val="50000"/>
-            </a:schemeClr>
-          </a:lnRef>
-          <a:fillRef idx="1">
-            <a:schemeClr val="accent1"/>
-          </a:fillRef>
-          <a:effectRef idx="0">
-            <a:schemeClr val="accent1"/>
-          </a:effectRef>
-          <a:fontRef idx="minor">
-            <a:schemeClr val="lt1"/>
-          </a:fontRef>
-        </p:style>
-        <p:txBody>
-          <a:bodyPr rtlCol="0" anchor="ctr"/>
-          <a:lstStyle/>
-          <a:p>
-            <a:pPr algn="ctr"/>
-            <a:endParaRPr kumimoji="1" lang="ja-JP" altLang="en-US"/>
-          </a:p>
-        </p:txBody>
-      </p:sp>
-      <p:sp>
-        <p:nvSpPr>
-          <p:cNvPr id="12" name="スマイル 11">
-            <a:extLst>
-              <a:ext uri="{FF2B5EF4-FFF2-40B4-BE49-F238E27FC236}">
-                <a16:creationId xmlns:a16="http://schemas.microsoft.com/office/drawing/2014/main" id="{B95B12D7-F5DD-4BE6-BE77-23016009DAD9}"/>
-              </a:ext>
-            </a:extLst>
-          </p:cNvPr>
-          <p:cNvSpPr/>
-          <p:nvPr/>
-        </p:nvSpPr>
-        <p:spPr>
-          <a:xfrm>
-            <a:off x="6621483" y="3645785"/>
-            <a:ext cx="251011" cy="236796"/>
-          </a:xfrm>
-          <a:prstGeom prst="smileyFace">
-            <a:avLst/>
-          </a:prstGeom>
-        </p:spPr>
-        <p:style>
-          <a:lnRef idx="2">
-            <a:schemeClr val="accent1">
-              <a:shade val="50000"/>
-            </a:schemeClr>
-          </a:lnRef>
-          <a:fillRef idx="1">
-            <a:schemeClr val="accent1"/>
-          </a:fillRef>
-          <a:effectRef idx="0">
-            <a:schemeClr val="accent1"/>
-          </a:effectRef>
-          <a:fontRef idx="minor">
-            <a:schemeClr val="lt1"/>
-          </a:fontRef>
-        </p:style>
-        <p:txBody>
-          <a:bodyPr rtlCol="0" anchor="ctr"/>
-          <a:lstStyle/>
-          <a:p>
-            <a:pPr algn="ctr"/>
-            <a:endParaRPr kumimoji="1" lang="ja-JP" altLang="en-US"/>
-          </a:p>
-        </p:txBody>
-      </p:sp>
-      <p:sp>
-        <p:nvSpPr>
-          <p:cNvPr id="13" name="スマイル 12">
-            <a:extLst>
-              <a:ext uri="{FF2B5EF4-FFF2-40B4-BE49-F238E27FC236}">
-                <a16:creationId xmlns:a16="http://schemas.microsoft.com/office/drawing/2014/main" id="{4714BF1B-58C7-4310-B86E-9D6B680101FC}"/>
-              </a:ext>
-            </a:extLst>
-          </p:cNvPr>
-          <p:cNvSpPr/>
-          <p:nvPr/>
-        </p:nvSpPr>
-        <p:spPr>
-          <a:xfrm>
-            <a:off x="7352107" y="3858153"/>
-            <a:ext cx="251011" cy="236796"/>
-          </a:xfrm>
-          <a:prstGeom prst="smileyFace">
-            <a:avLst/>
-          </a:prstGeom>
-          <a:solidFill>
-            <a:srgbClr val="FFFF00"/>
-          </a:solidFill>
-          <a:ln>
-            <a:solidFill>
-              <a:schemeClr val="tx1"/>
-            </a:solidFill>
-          </a:ln>
-        </p:spPr>
-        <p:style>
-          <a:lnRef idx="2">
-            <a:schemeClr val="accent1">
-              <a:shade val="50000"/>
-            </a:schemeClr>
-          </a:lnRef>
-          <a:fillRef idx="1">
-            <a:schemeClr val="accent1"/>
-          </a:fillRef>
-          <a:effectRef idx="0">
-            <a:schemeClr val="accent1"/>
-          </a:effectRef>
-          <a:fontRef idx="minor">
-            <a:schemeClr val="lt1"/>
-          </a:fontRef>
-        </p:style>
-        <p:txBody>
-          <a:bodyPr rtlCol="0" anchor="ctr"/>
-          <a:lstStyle/>
-          <a:p>
-            <a:pPr algn="ctr"/>
-            <a:endParaRPr kumimoji="1" lang="ja-JP" altLang="en-US"/>
-          </a:p>
-        </p:txBody>
-      </p:sp>
-      <p:sp>
-        <p:nvSpPr>
-          <p:cNvPr id="14" name="テキスト ボックス 13">
-            <a:extLst>
-              <a:ext uri="{FF2B5EF4-FFF2-40B4-BE49-F238E27FC236}">
-                <a16:creationId xmlns:a16="http://schemas.microsoft.com/office/drawing/2014/main" id="{EB72EFE6-D599-4453-8F92-5D71A56F3F8A}"/>
-              </a:ext>
-            </a:extLst>
-          </p:cNvPr>
-          <p:cNvSpPr txBox="1"/>
-          <p:nvPr/>
-        </p:nvSpPr>
-        <p:spPr>
-          <a:xfrm>
-            <a:off x="1993255" y="3145970"/>
-            <a:ext cx="1415772" cy="338554"/>
-          </a:xfrm>
-          <a:prstGeom prst="rect">
-            <a:avLst/>
-          </a:prstGeom>
-          <a:noFill/>
-        </p:spPr>
-        <p:txBody>
-          <a:bodyPr wrap="none" rtlCol="0">
-            <a:spAutoFit/>
-          </a:bodyPr>
-          <a:lstStyle/>
-          <a:p>
-            <a:r>
-              <a:rPr kumimoji="1" lang="ja-JP" altLang="en-US" sz="1600" b="1" dirty="0"/>
-              <a:t>クライアント</a:t>
-            </a:r>
-            <a:endParaRPr lang="en-US" altLang="ja-JP" sz="1600" b="1" dirty="0"/>
-          </a:p>
-        </p:txBody>
-      </p:sp>
-      <p:sp>
-        <p:nvSpPr>
-          <p:cNvPr id="15" name="テキスト ボックス 14">
-            <a:extLst>
-              <a:ext uri="{FF2B5EF4-FFF2-40B4-BE49-F238E27FC236}">
-                <a16:creationId xmlns:a16="http://schemas.microsoft.com/office/drawing/2014/main" id="{04359DE7-3DE6-4779-9938-7BAB5AF4A392}"/>
-              </a:ext>
-            </a:extLst>
-          </p:cNvPr>
-          <p:cNvSpPr txBox="1"/>
-          <p:nvPr/>
-        </p:nvSpPr>
-        <p:spPr>
-          <a:xfrm>
-            <a:off x="6406656" y="3145970"/>
-            <a:ext cx="1415772" cy="338554"/>
-          </a:xfrm>
-          <a:prstGeom prst="rect">
-            <a:avLst/>
-          </a:prstGeom>
-          <a:noFill/>
-        </p:spPr>
-        <p:txBody>
-          <a:bodyPr wrap="none" rtlCol="0">
-            <a:spAutoFit/>
-          </a:bodyPr>
-          <a:lstStyle/>
-          <a:p>
-            <a:r>
-              <a:rPr kumimoji="1" lang="ja-JP" altLang="en-US" sz="1600" b="1" dirty="0"/>
-              <a:t>クライアント</a:t>
-            </a:r>
-            <a:endParaRPr lang="en-US" altLang="ja-JP" sz="1600" b="1" dirty="0"/>
-          </a:p>
-        </p:txBody>
-      </p:sp>
-      <p:sp>
-        <p:nvSpPr>
-          <p:cNvPr id="2" name="矢印: 左右 1">
-            <a:extLst>
-              <a:ext uri="{FF2B5EF4-FFF2-40B4-BE49-F238E27FC236}">
-                <a16:creationId xmlns:a16="http://schemas.microsoft.com/office/drawing/2014/main" id="{F641EFCF-EF63-4B67-990C-78C3A95D0D12}"/>
-              </a:ext>
-            </a:extLst>
-          </p:cNvPr>
-          <p:cNvSpPr/>
-          <p:nvPr/>
-        </p:nvSpPr>
-        <p:spPr>
-          <a:xfrm>
-            <a:off x="3765177" y="3748131"/>
-            <a:ext cx="2260478" cy="583090"/>
-          </a:xfrm>
-          <a:prstGeom prst="leftRightArrow">
-            <a:avLst/>
-          </a:prstGeom>
-        </p:spPr>
-        <p:style>
-          <a:lnRef idx="2">
-            <a:schemeClr val="accent1">
-              <a:shade val="50000"/>
-            </a:schemeClr>
-          </a:lnRef>
-          <a:fillRef idx="1">
-            <a:schemeClr val="accent1"/>
-          </a:fillRef>
-          <a:effectRef idx="0">
-            <a:schemeClr val="accent1"/>
-          </a:effectRef>
-          <a:fontRef idx="minor">
-            <a:schemeClr val="lt1"/>
-          </a:fontRef>
-        </p:style>
-        <p:txBody>
-          <a:bodyPr rtlCol="0" anchor="ctr"/>
-          <a:lstStyle/>
-          <a:p>
-            <a:pPr algn="ctr"/>
-            <a:r>
-              <a:rPr kumimoji="1" lang="ja-JP" altLang="en-US" b="1" dirty="0"/>
-              <a:t>データ</a:t>
-            </a:r>
           </a:p>
         </p:txBody>
       </p:sp>
     </p:spTree>
     <p:extLst>
       <p:ext uri="{BB962C8B-B14F-4D97-AF65-F5344CB8AC3E}">
-        <p14:creationId xmlns:p14="http://schemas.microsoft.com/office/powerpoint/2010/main" val="1722213165"/>
+        <p14:creationId xmlns:p14="http://schemas.microsoft.com/office/powerpoint/2010/main" val="3674605242"/>
       </p:ext>
     </p:extLst>
   </p:cSld>
@@ -4666,7 +4310,7 @@
         <p:spPr>
           <a:xfrm>
             <a:off x="567542" y="491954"/>
-            <a:ext cx="2746265" cy="584775"/>
+            <a:ext cx="5501827" cy="584775"/>
           </a:xfrm>
           <a:prstGeom prst="rect">
             <a:avLst/>
@@ -4681,13 +4325,16 @@
           <a:p>
             <a:r>
               <a:rPr kumimoji="1" lang="ja-JP" altLang="en-US" sz="3200" b="1" u="sng" dirty="0"/>
-              <a:t>通信方式 </a:t>
+              <a:t>チャットプログラム（</a:t>
             </a:r>
             <a:r>
               <a:rPr kumimoji="1" lang="en-US" altLang="ja-JP" sz="3200" b="1" u="sng" dirty="0"/>
               <a:t>P2P</a:t>
             </a:r>
-            <a:endParaRPr kumimoji="1" lang="ja-JP" altLang="en-US" sz="3200" b="1" u="sng" dirty="0"/>
+            <a:r>
+              <a:rPr kumimoji="1" lang="ja-JP" altLang="en-US" sz="3200" b="1" u="sng" dirty="0"/>
+              <a:t>）</a:t>
+            </a:r>
           </a:p>
         </p:txBody>
       </p:sp>
@@ -4706,7 +4353,7 @@
         <p:spPr>
           <a:xfrm>
             <a:off x="567542" y="1216429"/>
-            <a:ext cx="7879080" cy="5262979"/>
+            <a:ext cx="5830442" cy="830997"/>
           </a:xfrm>
           <a:prstGeom prst="rect">
             <a:avLst/>
@@ -4720,125 +4367,8 @@
           <a:lstStyle/>
           <a:p>
             <a:r>
-              <a:rPr kumimoji="1" lang="en-US" altLang="ja-JP" sz="2400" dirty="0"/>
-              <a:t>P2P</a:t>
-            </a:r>
-            <a:r>
               <a:rPr kumimoji="1" lang="ja-JP" altLang="en-US" sz="2400" dirty="0"/>
-              <a:t>のメリットとデメリットです</a:t>
-            </a:r>
-            <a:endParaRPr kumimoji="1" lang="en-US" altLang="ja-JP" sz="2400" dirty="0"/>
-          </a:p>
-          <a:p>
-            <a:endParaRPr kumimoji="1" lang="en-US" altLang="ja-JP" sz="2400" dirty="0"/>
-          </a:p>
-          <a:p>
-            <a:r>
-              <a:rPr lang="ja-JP" altLang="en-US" sz="2400" b="1" dirty="0">
-                <a:solidFill>
-                  <a:srgbClr val="FF0000"/>
-                </a:solidFill>
-              </a:rPr>
-              <a:t>■</a:t>
-            </a:r>
-            <a:r>
-              <a:rPr lang="en-US" altLang="ja-JP" sz="2400" b="1" dirty="0">
-                <a:solidFill>
-                  <a:srgbClr val="FF0000"/>
-                </a:solidFill>
-              </a:rPr>
-              <a:t>P2P</a:t>
-            </a:r>
-            <a:r>
-              <a:rPr lang="ja-JP" altLang="en-US" sz="2400" b="1" dirty="0">
-                <a:solidFill>
-                  <a:srgbClr val="FF0000"/>
-                </a:solidFill>
-              </a:rPr>
-              <a:t>のメリット</a:t>
-            </a:r>
-            <a:endParaRPr lang="en-US" altLang="ja-JP" sz="2400" b="1" dirty="0">
-              <a:solidFill>
-                <a:srgbClr val="FF0000"/>
-              </a:solidFill>
-            </a:endParaRPr>
-          </a:p>
-          <a:p>
-            <a:r>
-              <a:rPr lang="ja-JP" altLang="en-US" sz="2400" dirty="0"/>
-              <a:t>・サーバーがいらない</a:t>
-            </a:r>
-            <a:endParaRPr lang="en-US" altLang="ja-JP" sz="2400" dirty="0"/>
-          </a:p>
-          <a:p>
-            <a:r>
-              <a:rPr lang="ja-JP" altLang="en-US" sz="2400" dirty="0"/>
-              <a:t>　・制作、運営コスト</a:t>
-            </a:r>
-            <a:r>
-              <a:rPr lang="en-US" altLang="ja-JP" sz="2400" dirty="0"/>
-              <a:t>0</a:t>
-            </a:r>
-          </a:p>
-          <a:p>
-            <a:r>
-              <a:rPr kumimoji="1" lang="ja-JP" altLang="en-US" sz="2400" dirty="0"/>
-              <a:t>・サーバーを仲介しない</a:t>
-            </a:r>
-            <a:endParaRPr kumimoji="1" lang="en-US" altLang="ja-JP" sz="2400" dirty="0"/>
-          </a:p>
-          <a:p>
-            <a:r>
-              <a:rPr lang="ja-JP" altLang="en-US" sz="2400" dirty="0"/>
-              <a:t>　・通信が速い</a:t>
-            </a:r>
-            <a:endParaRPr lang="en-US" altLang="ja-JP" sz="2400" dirty="0"/>
-          </a:p>
-          <a:p>
-            <a:endParaRPr kumimoji="1" lang="en-US" altLang="ja-JP" sz="2400" dirty="0"/>
-          </a:p>
-          <a:p>
-            <a:r>
-              <a:rPr lang="ja-JP" altLang="en-US" sz="2400" b="1" dirty="0">
-                <a:solidFill>
-                  <a:srgbClr val="0070C0"/>
-                </a:solidFill>
-              </a:rPr>
-              <a:t>■</a:t>
-            </a:r>
-            <a:r>
-              <a:rPr lang="en-US" altLang="ja-JP" sz="2400" b="1" dirty="0">
-                <a:solidFill>
-                  <a:srgbClr val="0070C0"/>
-                </a:solidFill>
-              </a:rPr>
-              <a:t>P2P</a:t>
-            </a:r>
-            <a:r>
-              <a:rPr lang="ja-JP" altLang="en-US" sz="2400" b="1" dirty="0">
-                <a:solidFill>
-                  <a:srgbClr val="0070C0"/>
-                </a:solidFill>
-              </a:rPr>
-              <a:t>のデメリット</a:t>
-            </a:r>
-            <a:endParaRPr lang="en-US" altLang="ja-JP" sz="2400" b="1" dirty="0">
-              <a:solidFill>
-                <a:srgbClr val="0070C0"/>
-              </a:solidFill>
-            </a:endParaRPr>
-          </a:p>
-          <a:p>
-            <a:r>
-              <a:rPr lang="ja-JP" altLang="en-US" sz="2400" dirty="0"/>
-              <a:t>・タイミングにラグが発生する</a:t>
-            </a:r>
-            <a:endParaRPr lang="en-US" altLang="ja-JP" sz="2400" dirty="0"/>
-          </a:p>
-          <a:p>
-            <a:r>
-              <a:rPr kumimoji="1" lang="ja-JP" altLang="en-US" sz="2400" dirty="0"/>
-              <a:t>　・１Ｐと２Ｐで見た目が違うときがある（</a:t>
+              <a:t>ホスト側から作成します。</a:t>
             </a:r>
             <a:r>
               <a:rPr kumimoji="1" lang="ja-JP" altLang="en-US" sz="2400" b="1" dirty="0">
@@ -4846,41 +4376,73 @@
                   <a:srgbClr val="FF0000"/>
                 </a:solidFill>
               </a:rPr>
-              <a:t>同期ずれ</a:t>
-            </a:r>
-            <a:r>
-              <a:rPr kumimoji="1" lang="ja-JP" altLang="en-US" sz="2400" dirty="0"/>
+              <a:t>（</a:t>
+            </a:r>
+            <a:r>
+              <a:rPr kumimoji="1" lang="en-US" altLang="ja-JP" sz="2400" b="1" dirty="0">
+                <a:solidFill>
+                  <a:srgbClr val="FF0000"/>
+                </a:solidFill>
+              </a:rPr>
+              <a:t>Host.cpp</a:t>
+            </a:r>
+            <a:r>
+              <a:rPr kumimoji="1" lang="ja-JP" altLang="en-US" sz="2400" b="1" dirty="0">
+                <a:solidFill>
+                  <a:srgbClr val="FF0000"/>
+                </a:solidFill>
+              </a:rPr>
               <a:t>）</a:t>
             </a:r>
+            <a:endParaRPr kumimoji="1" lang="en-US" altLang="ja-JP" sz="2400" b="1" dirty="0">
+              <a:solidFill>
+                <a:srgbClr val="FF0000"/>
+              </a:solidFill>
+            </a:endParaRPr>
+          </a:p>
+          <a:p>
+            <a:r>
+              <a:rPr lang="ja-JP" altLang="en-US" sz="2400" dirty="0"/>
+              <a:t>通信開始処理で受付を開始します。</a:t>
+            </a:r>
             <a:endParaRPr kumimoji="1" lang="en-US" altLang="ja-JP" sz="2400" dirty="0"/>
           </a:p>
-          <a:p>
-            <a:r>
-              <a:rPr lang="ja-JP" altLang="en-US" sz="2400" dirty="0"/>
-              <a:t>・チート、改造をリアルタイムで検知できない</a:t>
-            </a:r>
-            <a:endParaRPr lang="en-US" altLang="ja-JP" sz="2400" dirty="0"/>
-          </a:p>
-          <a:p>
-            <a:r>
-              <a:rPr kumimoji="1" lang="ja-JP" altLang="en-US" sz="2400" dirty="0"/>
-              <a:t>・デメリットに対する対策をする必要がある</a:t>
-            </a:r>
-            <a:endParaRPr kumimoji="1" lang="en-US" altLang="ja-JP" sz="2400" dirty="0"/>
-          </a:p>
-          <a:p>
-            <a:r>
-              <a:rPr lang="ja-JP" altLang="en-US" sz="2400" dirty="0"/>
-              <a:t>　・入力同期やロールバック方式など</a:t>
-            </a:r>
-            <a:endParaRPr kumimoji="1" lang="en-US" altLang="ja-JP" sz="2400" dirty="0"/>
-          </a:p>
-        </p:txBody>
-      </p:sp>
+        </p:txBody>
+      </p:sp>
+      <p:pic>
+        <p:nvPicPr>
+          <p:cNvPr id="3" name="図 2">
+            <a:extLst>
+              <a:ext uri="{FF2B5EF4-FFF2-40B4-BE49-F238E27FC236}">
+                <a16:creationId xmlns:a16="http://schemas.microsoft.com/office/drawing/2014/main" id="{35612D93-181F-43D4-9F82-F8FE6F21BBF6}"/>
+              </a:ext>
+            </a:extLst>
+          </p:cNvPr>
+          <p:cNvPicPr>
+            <a:picLocks noChangeAspect="1"/>
+          </p:cNvPicPr>
+          <p:nvPr/>
+        </p:nvPicPr>
+        <p:blipFill>
+          <a:blip r:embed="rId2"/>
+          <a:stretch>
+            <a:fillRect/>
+          </a:stretch>
+        </p:blipFill>
+        <p:spPr>
+          <a:xfrm>
+            <a:off x="567542" y="2187126"/>
+            <a:ext cx="9144594" cy="2623449"/>
+          </a:xfrm>
+          <a:prstGeom prst="rect">
+            <a:avLst/>
+          </a:prstGeom>
+        </p:spPr>
+      </p:pic>
     </p:spTree>
     <p:extLst>
       <p:ext uri="{BB962C8B-B14F-4D97-AF65-F5344CB8AC3E}">
-        <p14:creationId xmlns:p14="http://schemas.microsoft.com/office/powerpoint/2010/main" val="3400703879"/>
+        <p14:creationId xmlns:p14="http://schemas.microsoft.com/office/powerpoint/2010/main" val="72187591"/>
       </p:ext>
     </p:extLst>
   </p:cSld>
@@ -4922,7 +4484,7 @@
         <p:spPr>
           <a:xfrm>
             <a:off x="567542" y="491954"/>
-            <a:ext cx="6046848" cy="584775"/>
+            <a:ext cx="5501827" cy="584775"/>
           </a:xfrm>
           <a:prstGeom prst="rect">
             <a:avLst/>
@@ -4937,7 +4499,15 @@
           <a:p>
             <a:r>
               <a:rPr kumimoji="1" lang="ja-JP" altLang="en-US" sz="3200" b="1" u="sng" dirty="0"/>
-              <a:t>通信方式 クライアントサーバー</a:t>
+              <a:t>チャットプログラム（</a:t>
+            </a:r>
+            <a:r>
+              <a:rPr kumimoji="1" lang="en-US" altLang="ja-JP" sz="3200" b="1" u="sng" dirty="0"/>
+              <a:t>P2P</a:t>
+            </a:r>
+            <a:r>
+              <a:rPr kumimoji="1" lang="ja-JP" altLang="en-US" sz="3200" b="1" u="sng" dirty="0"/>
+              <a:t>）</a:t>
             </a:r>
           </a:p>
         </p:txBody>
@@ -4957,7 +4527,7 @@
         <p:spPr>
           <a:xfrm>
             <a:off x="567542" y="1216429"/>
-            <a:ext cx="9725739" cy="1569660"/>
+            <a:ext cx="5724644" cy="830997"/>
           </a:xfrm>
           <a:prstGeom prst="rect">
             <a:avLst/>
@@ -4971,782 +4541,54 @@
           <a:lstStyle/>
           <a:p>
             <a:r>
-              <a:rPr kumimoji="1" lang="ja-JP" altLang="en-US" sz="2400" b="1" dirty="0">
-                <a:solidFill>
-                  <a:srgbClr val="FF0000"/>
-                </a:solidFill>
-              </a:rPr>
-              <a:t>クライアントサーバー方式</a:t>
-            </a:r>
-            <a:r>
-              <a:rPr kumimoji="1" lang="ja-JP" altLang="en-US" sz="2400" dirty="0"/>
-              <a:t>は</a:t>
-            </a:r>
-            <a:r>
-              <a:rPr kumimoji="1" lang="ja-JP" altLang="en-US" sz="2400" b="1" dirty="0">
-                <a:solidFill>
-                  <a:srgbClr val="FF0000"/>
-                </a:solidFill>
-              </a:rPr>
-              <a:t>サーバーを用意して通信する方式</a:t>
-            </a:r>
-            <a:r>
-              <a:rPr kumimoji="1" lang="ja-JP" altLang="en-US" sz="2400" dirty="0"/>
-              <a:t>です。</a:t>
-            </a:r>
-            <a:endParaRPr kumimoji="1" lang="en-US" altLang="ja-JP" sz="2400" dirty="0"/>
-          </a:p>
-          <a:p>
-            <a:r>
-              <a:rPr lang="ja-JP" altLang="en-US" sz="2400" b="1" dirty="0">
-                <a:solidFill>
-                  <a:srgbClr val="FF0000"/>
-                </a:solidFill>
-              </a:rPr>
-              <a:t>サーバーには必ず正しいデータが格納</a:t>
-            </a:r>
-            <a:r>
               <a:rPr lang="ja-JP" altLang="en-US" sz="2400" dirty="0"/>
-              <a:t>されており、</a:t>
+              <a:t>クライアントが参加してくるまで待ち、</a:t>
             </a:r>
             <a:endParaRPr lang="en-US" altLang="ja-JP" sz="2400" dirty="0"/>
           </a:p>
           <a:p>
             <a:r>
-              <a:rPr kumimoji="1" lang="ja-JP" altLang="en-US" sz="2400" dirty="0"/>
-              <a:t>そのデータを各クライアントに送信します。</a:t>
-            </a:r>
-            <a:endParaRPr kumimoji="1" lang="en-US" altLang="ja-JP" sz="2400" dirty="0"/>
-          </a:p>
-          <a:p>
-            <a:r>
               <a:rPr lang="ja-JP" altLang="en-US" sz="2400" dirty="0"/>
-              <a:t>主に</a:t>
-            </a:r>
-            <a:r>
-              <a:rPr lang="ja-JP" altLang="en-US" sz="2400" b="1" dirty="0">
-                <a:solidFill>
-                  <a:srgbClr val="FF0000"/>
-                </a:solidFill>
-              </a:rPr>
-              <a:t>多人数参加型のゲーム</a:t>
-            </a:r>
-            <a:r>
-              <a:rPr lang="ja-JP" altLang="en-US" sz="2400" dirty="0"/>
-              <a:t>（</a:t>
-            </a:r>
-            <a:r>
-              <a:rPr lang="en-US" altLang="ja-JP" sz="2400" dirty="0"/>
-              <a:t>TPS</a:t>
-            </a:r>
-            <a:r>
-              <a:rPr lang="ja-JP" altLang="en-US" sz="2400" dirty="0"/>
-              <a:t>、</a:t>
-            </a:r>
-            <a:r>
-              <a:rPr lang="en-US" altLang="ja-JP" sz="2400" dirty="0"/>
-              <a:t>FPS</a:t>
-            </a:r>
-            <a:r>
-              <a:rPr lang="ja-JP" altLang="en-US" sz="2400" dirty="0"/>
-              <a:t>など）で採用されます。</a:t>
-            </a:r>
-            <a:endParaRPr kumimoji="1" lang="en-US" altLang="ja-JP" sz="2400" dirty="0"/>
-          </a:p>
-        </p:txBody>
-      </p:sp>
-      <p:grpSp>
-        <p:nvGrpSpPr>
-          <p:cNvPr id="3" name="グループ化 2">
-            <a:extLst>
-              <a:ext uri="{FF2B5EF4-FFF2-40B4-BE49-F238E27FC236}">
-                <a16:creationId xmlns:a16="http://schemas.microsoft.com/office/drawing/2014/main" id="{5D8C9E62-AC96-4FAB-B2F8-86F1EE6466E6}"/>
-              </a:ext>
-            </a:extLst>
-          </p:cNvPr>
-          <p:cNvGrpSpPr/>
+              <a:t>参加者の情報は記録しておきましょう。</a:t>
+            </a:r>
+            <a:endParaRPr lang="en-US" altLang="ja-JP" sz="2400" dirty="0"/>
+          </a:p>
+        </p:txBody>
+      </p:sp>
+      <p:pic>
+        <p:nvPicPr>
+          <p:cNvPr id="5" name="図 4">
+            <a:extLst>
+              <a:ext uri="{FF2B5EF4-FFF2-40B4-BE49-F238E27FC236}">
+                <a16:creationId xmlns:a16="http://schemas.microsoft.com/office/drawing/2014/main" id="{AB81536B-635F-4A41-9A92-CE2A17770D45}"/>
+              </a:ext>
+            </a:extLst>
+          </p:cNvPr>
+          <p:cNvPicPr>
+            <a:picLocks noChangeAspect="1"/>
+          </p:cNvPicPr>
           <p:nvPr/>
-        </p:nvGrpSpPr>
-        <p:grpSpPr>
-          <a:xfrm>
-            <a:off x="567542" y="2925789"/>
-            <a:ext cx="6221038" cy="3531324"/>
-            <a:chOff x="1013480" y="2641364"/>
-            <a:chExt cx="6966918" cy="4063466"/>
-          </a:xfrm>
-        </p:grpSpPr>
-        <p:sp>
-          <p:nvSpPr>
-            <p:cNvPr id="5" name="二等辺三角形 4">
-              <a:extLst>
-                <a:ext uri="{FF2B5EF4-FFF2-40B4-BE49-F238E27FC236}">
-                  <a16:creationId xmlns:a16="http://schemas.microsoft.com/office/drawing/2014/main" id="{F8AE2564-9C06-4CC7-BBA5-01BEBFA50536}"/>
-                </a:ext>
-              </a:extLst>
-            </p:cNvPr>
-            <p:cNvSpPr/>
-            <p:nvPr/>
-          </p:nvSpPr>
-          <p:spPr>
-            <a:xfrm>
-              <a:off x="1533434" y="4106345"/>
-              <a:ext cx="699247" cy="555812"/>
-            </a:xfrm>
-            <a:prstGeom prst="triangle">
-              <a:avLst/>
-            </a:prstGeom>
-          </p:spPr>
-          <p:style>
-            <a:lnRef idx="2">
-              <a:schemeClr val="accent1">
-                <a:shade val="50000"/>
-              </a:schemeClr>
-            </a:lnRef>
-            <a:fillRef idx="1">
-              <a:schemeClr val="accent1"/>
-            </a:fillRef>
-            <a:effectRef idx="0">
-              <a:schemeClr val="accent1"/>
-            </a:effectRef>
-            <a:fontRef idx="minor">
-              <a:schemeClr val="lt1"/>
-            </a:fontRef>
-          </p:style>
-          <p:txBody>
-            <a:bodyPr rtlCol="0" anchor="ctr"/>
-            <a:lstStyle/>
-            <a:p>
-              <a:pPr algn="ctr"/>
-              <a:endParaRPr kumimoji="1" lang="ja-JP" altLang="en-US"/>
-            </a:p>
-          </p:txBody>
-        </p:sp>
-        <p:sp>
-          <p:nvSpPr>
-            <p:cNvPr id="7" name="正方形/長方形 6">
-              <a:extLst>
-                <a:ext uri="{FF2B5EF4-FFF2-40B4-BE49-F238E27FC236}">
-                  <a16:creationId xmlns:a16="http://schemas.microsoft.com/office/drawing/2014/main" id="{DA6568F9-232A-4A7E-83DB-3FD8852BF368}"/>
-                </a:ext>
-              </a:extLst>
-            </p:cNvPr>
-            <p:cNvSpPr/>
-            <p:nvPr/>
-          </p:nvSpPr>
-          <p:spPr>
-            <a:xfrm>
-              <a:off x="1013480" y="3012651"/>
-              <a:ext cx="1748118" cy="1093694"/>
-            </a:xfrm>
-            <a:prstGeom prst="rect">
-              <a:avLst/>
-            </a:prstGeom>
-            <a:noFill/>
-          </p:spPr>
-          <p:style>
-            <a:lnRef idx="2">
-              <a:schemeClr val="accent1">
-                <a:shade val="50000"/>
-              </a:schemeClr>
-            </a:lnRef>
-            <a:fillRef idx="1">
-              <a:schemeClr val="accent1"/>
-            </a:fillRef>
-            <a:effectRef idx="0">
-              <a:schemeClr val="accent1"/>
-            </a:effectRef>
-            <a:fontRef idx="minor">
-              <a:schemeClr val="lt1"/>
-            </a:fontRef>
-          </p:style>
-          <p:txBody>
-            <a:bodyPr rtlCol="0" anchor="ctr"/>
-            <a:lstStyle/>
-            <a:p>
-              <a:pPr algn="ctr"/>
-              <a:endParaRPr kumimoji="1" lang="ja-JP" altLang="en-US"/>
-            </a:p>
-          </p:txBody>
-        </p:sp>
-        <p:sp>
-          <p:nvSpPr>
-            <p:cNvPr id="8" name="スマイル 7">
-              <a:extLst>
-                <a:ext uri="{FF2B5EF4-FFF2-40B4-BE49-F238E27FC236}">
-                  <a16:creationId xmlns:a16="http://schemas.microsoft.com/office/drawing/2014/main" id="{B19C6A8D-2B38-4F13-B3C4-30CF59E67DB2}"/>
-                </a:ext>
-              </a:extLst>
-            </p:cNvPr>
-            <p:cNvSpPr/>
-            <p:nvPr/>
-          </p:nvSpPr>
-          <p:spPr>
-            <a:xfrm>
-              <a:off x="1389998" y="3204304"/>
-              <a:ext cx="251011" cy="236796"/>
-            </a:xfrm>
-            <a:prstGeom prst="smileyFace">
-              <a:avLst/>
-            </a:prstGeom>
-          </p:spPr>
-          <p:style>
-            <a:lnRef idx="2">
-              <a:schemeClr val="accent1">
-                <a:shade val="50000"/>
-              </a:schemeClr>
-            </a:lnRef>
-            <a:fillRef idx="1">
-              <a:schemeClr val="accent1"/>
-            </a:fillRef>
-            <a:effectRef idx="0">
-              <a:schemeClr val="accent1"/>
-            </a:effectRef>
-            <a:fontRef idx="minor">
-              <a:schemeClr val="lt1"/>
-            </a:fontRef>
-          </p:style>
-          <p:txBody>
-            <a:bodyPr rtlCol="0" anchor="ctr"/>
-            <a:lstStyle/>
-            <a:p>
-              <a:pPr algn="ctr"/>
-              <a:endParaRPr kumimoji="1" lang="ja-JP" altLang="en-US"/>
-            </a:p>
-          </p:txBody>
-        </p:sp>
-        <p:sp>
-          <p:nvSpPr>
-            <p:cNvPr id="9" name="スマイル 8">
-              <a:extLst>
-                <a:ext uri="{FF2B5EF4-FFF2-40B4-BE49-F238E27FC236}">
-                  <a16:creationId xmlns:a16="http://schemas.microsoft.com/office/drawing/2014/main" id="{D4382F14-BE54-462F-BACF-8F1B52492FE6}"/>
-                </a:ext>
-              </a:extLst>
-            </p:cNvPr>
-            <p:cNvSpPr/>
-            <p:nvPr/>
-          </p:nvSpPr>
-          <p:spPr>
-            <a:xfrm>
-              <a:off x="2120622" y="3416672"/>
-              <a:ext cx="251011" cy="236796"/>
-            </a:xfrm>
-            <a:prstGeom prst="smileyFace">
-              <a:avLst/>
-            </a:prstGeom>
-            <a:solidFill>
-              <a:srgbClr val="FFFF00"/>
-            </a:solidFill>
-            <a:ln>
-              <a:solidFill>
-                <a:schemeClr val="tx1"/>
-              </a:solidFill>
-            </a:ln>
-          </p:spPr>
-          <p:style>
-            <a:lnRef idx="2">
-              <a:schemeClr val="accent1">
-                <a:shade val="50000"/>
-              </a:schemeClr>
-            </a:lnRef>
-            <a:fillRef idx="1">
-              <a:schemeClr val="accent1"/>
-            </a:fillRef>
-            <a:effectRef idx="0">
-              <a:schemeClr val="accent1"/>
-            </a:effectRef>
-            <a:fontRef idx="minor">
-              <a:schemeClr val="lt1"/>
-            </a:fontRef>
-          </p:style>
-          <p:txBody>
-            <a:bodyPr rtlCol="0" anchor="ctr"/>
-            <a:lstStyle/>
-            <a:p>
-              <a:pPr algn="ctr"/>
-              <a:endParaRPr kumimoji="1" lang="ja-JP" altLang="en-US"/>
-            </a:p>
-          </p:txBody>
-        </p:sp>
-        <p:sp>
-          <p:nvSpPr>
-            <p:cNvPr id="10" name="二等辺三角形 9">
-              <a:extLst>
-                <a:ext uri="{FF2B5EF4-FFF2-40B4-BE49-F238E27FC236}">
-                  <a16:creationId xmlns:a16="http://schemas.microsoft.com/office/drawing/2014/main" id="{D082CFF6-6A9A-43C3-A36D-897424BB5E8F}"/>
-                </a:ext>
-              </a:extLst>
-            </p:cNvPr>
-            <p:cNvSpPr/>
-            <p:nvPr/>
-          </p:nvSpPr>
-          <p:spPr>
-            <a:xfrm>
-              <a:off x="1533434" y="6149018"/>
-              <a:ext cx="699247" cy="555812"/>
-            </a:xfrm>
-            <a:prstGeom prst="triangle">
-              <a:avLst/>
-            </a:prstGeom>
-          </p:spPr>
-          <p:style>
-            <a:lnRef idx="2">
-              <a:schemeClr val="accent1">
-                <a:shade val="50000"/>
-              </a:schemeClr>
-            </a:lnRef>
-            <a:fillRef idx="1">
-              <a:schemeClr val="accent1"/>
-            </a:fillRef>
-            <a:effectRef idx="0">
-              <a:schemeClr val="accent1"/>
-            </a:effectRef>
-            <a:fontRef idx="minor">
-              <a:schemeClr val="lt1"/>
-            </a:fontRef>
-          </p:style>
-          <p:txBody>
-            <a:bodyPr rtlCol="0" anchor="ctr"/>
-            <a:lstStyle/>
-            <a:p>
-              <a:pPr algn="ctr"/>
-              <a:endParaRPr kumimoji="1" lang="ja-JP" altLang="en-US"/>
-            </a:p>
-          </p:txBody>
-        </p:sp>
-        <p:sp>
-          <p:nvSpPr>
-            <p:cNvPr id="11" name="正方形/長方形 10">
-              <a:extLst>
-                <a:ext uri="{FF2B5EF4-FFF2-40B4-BE49-F238E27FC236}">
-                  <a16:creationId xmlns:a16="http://schemas.microsoft.com/office/drawing/2014/main" id="{BAC039B1-C514-4297-AD9D-0BFD75C854C8}"/>
-                </a:ext>
-              </a:extLst>
-            </p:cNvPr>
-            <p:cNvSpPr/>
-            <p:nvPr/>
-          </p:nvSpPr>
-          <p:spPr>
-            <a:xfrm>
-              <a:off x="1013480" y="5055324"/>
-              <a:ext cx="1748118" cy="1093694"/>
-            </a:xfrm>
-            <a:prstGeom prst="rect">
-              <a:avLst/>
-            </a:prstGeom>
-            <a:noFill/>
-          </p:spPr>
-          <p:style>
-            <a:lnRef idx="2">
-              <a:schemeClr val="accent1">
-                <a:shade val="50000"/>
-              </a:schemeClr>
-            </a:lnRef>
-            <a:fillRef idx="1">
-              <a:schemeClr val="accent1"/>
-            </a:fillRef>
-            <a:effectRef idx="0">
-              <a:schemeClr val="accent1"/>
-            </a:effectRef>
-            <a:fontRef idx="minor">
-              <a:schemeClr val="lt1"/>
-            </a:fontRef>
-          </p:style>
-          <p:txBody>
-            <a:bodyPr rtlCol="0" anchor="ctr"/>
-            <a:lstStyle/>
-            <a:p>
-              <a:pPr algn="ctr"/>
-              <a:endParaRPr kumimoji="1" lang="ja-JP" altLang="en-US"/>
-            </a:p>
-          </p:txBody>
-        </p:sp>
-        <p:sp>
-          <p:nvSpPr>
-            <p:cNvPr id="12" name="スマイル 11">
-              <a:extLst>
-                <a:ext uri="{FF2B5EF4-FFF2-40B4-BE49-F238E27FC236}">
-                  <a16:creationId xmlns:a16="http://schemas.microsoft.com/office/drawing/2014/main" id="{B95B12D7-F5DD-4BE6-BE77-23016009DAD9}"/>
-                </a:ext>
-              </a:extLst>
-            </p:cNvPr>
-            <p:cNvSpPr/>
-            <p:nvPr/>
-          </p:nvSpPr>
-          <p:spPr>
-            <a:xfrm>
-              <a:off x="1389998" y="5246977"/>
-              <a:ext cx="251011" cy="236796"/>
-            </a:xfrm>
-            <a:prstGeom prst="smileyFace">
-              <a:avLst/>
-            </a:prstGeom>
-          </p:spPr>
-          <p:style>
-            <a:lnRef idx="2">
-              <a:schemeClr val="accent1">
-                <a:shade val="50000"/>
-              </a:schemeClr>
-            </a:lnRef>
-            <a:fillRef idx="1">
-              <a:schemeClr val="accent1"/>
-            </a:fillRef>
-            <a:effectRef idx="0">
-              <a:schemeClr val="accent1"/>
-            </a:effectRef>
-            <a:fontRef idx="minor">
-              <a:schemeClr val="lt1"/>
-            </a:fontRef>
-          </p:style>
-          <p:txBody>
-            <a:bodyPr rtlCol="0" anchor="ctr"/>
-            <a:lstStyle/>
-            <a:p>
-              <a:pPr algn="ctr"/>
-              <a:endParaRPr kumimoji="1" lang="ja-JP" altLang="en-US"/>
-            </a:p>
-          </p:txBody>
-        </p:sp>
-        <p:sp>
-          <p:nvSpPr>
-            <p:cNvPr id="13" name="スマイル 12">
-              <a:extLst>
-                <a:ext uri="{FF2B5EF4-FFF2-40B4-BE49-F238E27FC236}">
-                  <a16:creationId xmlns:a16="http://schemas.microsoft.com/office/drawing/2014/main" id="{4714BF1B-58C7-4310-B86E-9D6B680101FC}"/>
-                </a:ext>
-              </a:extLst>
-            </p:cNvPr>
-            <p:cNvSpPr/>
-            <p:nvPr/>
-          </p:nvSpPr>
-          <p:spPr>
-            <a:xfrm>
-              <a:off x="2120622" y="5459345"/>
-              <a:ext cx="251011" cy="236796"/>
-            </a:xfrm>
-            <a:prstGeom prst="smileyFace">
-              <a:avLst/>
-            </a:prstGeom>
-            <a:solidFill>
-              <a:srgbClr val="FFFF00"/>
-            </a:solidFill>
-            <a:ln>
-              <a:solidFill>
-                <a:schemeClr val="tx1"/>
-              </a:solidFill>
-            </a:ln>
-          </p:spPr>
-          <p:style>
-            <a:lnRef idx="2">
-              <a:schemeClr val="accent1">
-                <a:shade val="50000"/>
-              </a:schemeClr>
-            </a:lnRef>
-            <a:fillRef idx="1">
-              <a:schemeClr val="accent1"/>
-            </a:fillRef>
-            <a:effectRef idx="0">
-              <a:schemeClr val="accent1"/>
-            </a:effectRef>
-            <a:fontRef idx="minor">
-              <a:schemeClr val="lt1"/>
-            </a:fontRef>
-          </p:style>
-          <p:txBody>
-            <a:bodyPr rtlCol="0" anchor="ctr"/>
-            <a:lstStyle/>
-            <a:p>
-              <a:pPr algn="ctr"/>
-              <a:endParaRPr kumimoji="1" lang="ja-JP" altLang="en-US"/>
-            </a:p>
-          </p:txBody>
-        </p:sp>
-        <p:sp>
-          <p:nvSpPr>
-            <p:cNvPr id="14" name="テキスト ボックス 13">
-              <a:extLst>
-                <a:ext uri="{FF2B5EF4-FFF2-40B4-BE49-F238E27FC236}">
-                  <a16:creationId xmlns:a16="http://schemas.microsoft.com/office/drawing/2014/main" id="{EB72EFE6-D599-4453-8F92-5D71A56F3F8A}"/>
-                </a:ext>
-              </a:extLst>
-            </p:cNvPr>
-            <p:cNvSpPr txBox="1"/>
-            <p:nvPr/>
-          </p:nvSpPr>
-          <p:spPr>
-            <a:xfrm>
-              <a:off x="1175171" y="2641364"/>
-              <a:ext cx="1415772" cy="338554"/>
-            </a:xfrm>
-            <a:prstGeom prst="rect">
-              <a:avLst/>
-            </a:prstGeom>
-            <a:noFill/>
-          </p:spPr>
-          <p:txBody>
-            <a:bodyPr wrap="none" rtlCol="0">
-              <a:spAutoFit/>
-            </a:bodyPr>
-            <a:lstStyle/>
-            <a:p>
-              <a:r>
-                <a:rPr kumimoji="1" lang="ja-JP" altLang="en-US" sz="1600" b="1" dirty="0"/>
-                <a:t>クライアント</a:t>
-              </a:r>
-              <a:endParaRPr lang="en-US" altLang="ja-JP" sz="1600" b="1" dirty="0"/>
-            </a:p>
-          </p:txBody>
-        </p:sp>
-        <p:sp>
-          <p:nvSpPr>
-            <p:cNvPr id="15" name="テキスト ボックス 14">
-              <a:extLst>
-                <a:ext uri="{FF2B5EF4-FFF2-40B4-BE49-F238E27FC236}">
-                  <a16:creationId xmlns:a16="http://schemas.microsoft.com/office/drawing/2014/main" id="{04359DE7-3DE6-4779-9938-7BAB5AF4A392}"/>
-                </a:ext>
-              </a:extLst>
-            </p:cNvPr>
-            <p:cNvSpPr txBox="1"/>
-            <p:nvPr/>
-          </p:nvSpPr>
-          <p:spPr>
-            <a:xfrm>
-              <a:off x="1175171" y="4747162"/>
-              <a:ext cx="1415772" cy="338554"/>
-            </a:xfrm>
-            <a:prstGeom prst="rect">
-              <a:avLst/>
-            </a:prstGeom>
-            <a:noFill/>
-          </p:spPr>
-          <p:txBody>
-            <a:bodyPr wrap="none" rtlCol="0">
-              <a:spAutoFit/>
-            </a:bodyPr>
-            <a:lstStyle/>
-            <a:p>
-              <a:r>
-                <a:rPr kumimoji="1" lang="ja-JP" altLang="en-US" sz="1600" b="1" dirty="0"/>
-                <a:t>クライアント</a:t>
-              </a:r>
-              <a:endParaRPr lang="en-US" altLang="ja-JP" sz="1600" b="1" dirty="0"/>
-            </a:p>
-          </p:txBody>
-        </p:sp>
-        <p:sp>
-          <p:nvSpPr>
-            <p:cNvPr id="2" name="矢印: 左右 1">
-              <a:extLst>
-                <a:ext uri="{FF2B5EF4-FFF2-40B4-BE49-F238E27FC236}">
-                  <a16:creationId xmlns:a16="http://schemas.microsoft.com/office/drawing/2014/main" id="{F641EFCF-EF63-4B67-990C-78C3A95D0D12}"/>
-                </a:ext>
-              </a:extLst>
-            </p:cNvPr>
-            <p:cNvSpPr/>
-            <p:nvPr/>
-          </p:nvSpPr>
-          <p:spPr>
-            <a:xfrm>
-              <a:off x="3124653" y="3303666"/>
-              <a:ext cx="2260478" cy="583090"/>
-            </a:xfrm>
-            <a:prstGeom prst="leftRightArrow">
-              <a:avLst/>
-            </a:prstGeom>
-          </p:spPr>
-          <p:style>
-            <a:lnRef idx="2">
-              <a:schemeClr val="accent1">
-                <a:shade val="50000"/>
-              </a:schemeClr>
-            </a:lnRef>
-            <a:fillRef idx="1">
-              <a:schemeClr val="accent1"/>
-            </a:fillRef>
-            <a:effectRef idx="0">
-              <a:schemeClr val="accent1"/>
-            </a:effectRef>
-            <a:fontRef idx="minor">
-              <a:schemeClr val="lt1"/>
-            </a:fontRef>
-          </p:style>
-          <p:txBody>
-            <a:bodyPr rtlCol="0" anchor="ctr"/>
-            <a:lstStyle/>
-            <a:p>
-              <a:pPr algn="ctr"/>
-              <a:r>
-                <a:rPr kumimoji="1" lang="ja-JP" altLang="en-US" b="1" dirty="0"/>
-                <a:t>データ</a:t>
-              </a:r>
-            </a:p>
-          </p:txBody>
-        </p:sp>
-        <p:grpSp>
-          <p:nvGrpSpPr>
-            <p:cNvPr id="16" name="グループ化 15">
-              <a:extLst>
-                <a:ext uri="{FF2B5EF4-FFF2-40B4-BE49-F238E27FC236}">
-                  <a16:creationId xmlns:a16="http://schemas.microsoft.com/office/drawing/2014/main" id="{ADE41BDB-C44D-45C2-A121-E43AD5B0D71A}"/>
-                </a:ext>
-              </a:extLst>
-            </p:cNvPr>
-            <p:cNvGrpSpPr/>
-            <p:nvPr/>
-          </p:nvGrpSpPr>
-          <p:grpSpPr>
-            <a:xfrm>
-              <a:off x="5748186" y="3048937"/>
-              <a:ext cx="2232212" cy="3356854"/>
-              <a:chOff x="6096000" y="2814407"/>
-              <a:chExt cx="2232212" cy="3356854"/>
-            </a:xfrm>
-          </p:grpSpPr>
-          <p:sp>
-            <p:nvSpPr>
-              <p:cNvPr id="17" name="直方体 16">
-                <a:extLst>
-                  <a:ext uri="{FF2B5EF4-FFF2-40B4-BE49-F238E27FC236}">
-                    <a16:creationId xmlns:a16="http://schemas.microsoft.com/office/drawing/2014/main" id="{40559FB0-468E-4B3A-BDF1-267BE3B6FA28}"/>
-                  </a:ext>
-                </a:extLst>
-              </p:cNvPr>
-              <p:cNvSpPr/>
-              <p:nvPr/>
-            </p:nvSpPr>
-            <p:spPr>
-              <a:xfrm>
-                <a:off x="6096000" y="2814407"/>
-                <a:ext cx="2232212" cy="3356854"/>
-              </a:xfrm>
-              <a:prstGeom prst="cube">
-                <a:avLst/>
-              </a:prstGeom>
-            </p:spPr>
-            <p:style>
-              <a:lnRef idx="2">
-                <a:schemeClr val="accent1">
-                  <a:shade val="50000"/>
-                </a:schemeClr>
-              </a:lnRef>
-              <a:fillRef idx="1">
-                <a:schemeClr val="accent1"/>
-              </a:fillRef>
-              <a:effectRef idx="0">
-                <a:schemeClr val="accent1"/>
-              </a:effectRef>
-              <a:fontRef idx="minor">
-                <a:schemeClr val="lt1"/>
-              </a:fontRef>
-            </p:style>
-            <p:txBody>
-              <a:bodyPr rtlCol="0" anchor="ctr"/>
-              <a:lstStyle/>
-              <a:p>
-                <a:pPr algn="ctr"/>
-                <a:endParaRPr kumimoji="1" lang="ja-JP" altLang="en-US" dirty="0"/>
-              </a:p>
-            </p:txBody>
-          </p:sp>
-          <p:sp>
-            <p:nvSpPr>
-              <p:cNvPr id="18" name="テキスト ボックス 17">
-                <a:extLst>
-                  <a:ext uri="{FF2B5EF4-FFF2-40B4-BE49-F238E27FC236}">
-                    <a16:creationId xmlns:a16="http://schemas.microsoft.com/office/drawing/2014/main" id="{187F7EC2-B2D3-4B82-9A15-EA633FC3D772}"/>
-                  </a:ext>
-                </a:extLst>
-              </p:cNvPr>
-              <p:cNvSpPr txBox="1"/>
-              <p:nvPr/>
-            </p:nvSpPr>
-            <p:spPr>
-              <a:xfrm>
-                <a:off x="6233236" y="3554934"/>
-                <a:ext cx="1415772" cy="461665"/>
-              </a:xfrm>
-              <a:prstGeom prst="rect">
-                <a:avLst/>
-              </a:prstGeom>
-              <a:noFill/>
-            </p:spPr>
-            <p:txBody>
-              <a:bodyPr wrap="none" rtlCol="0">
-                <a:spAutoFit/>
-              </a:bodyPr>
-              <a:lstStyle/>
-              <a:p>
-                <a:r>
-                  <a:rPr kumimoji="1" lang="ja-JP" altLang="en-US" sz="2400" b="1" dirty="0">
-                    <a:solidFill>
-                      <a:schemeClr val="bg1"/>
-                    </a:solidFill>
-                  </a:rPr>
-                  <a:t>サーバー</a:t>
-                </a:r>
-                <a:endParaRPr lang="en-US" altLang="ja-JP" sz="2400" b="1" dirty="0">
-                  <a:solidFill>
-                    <a:schemeClr val="bg1"/>
-                  </a:solidFill>
-                </a:endParaRPr>
-              </a:p>
-            </p:txBody>
-          </p:sp>
-        </p:grpSp>
-        <p:sp>
-          <p:nvSpPr>
-            <p:cNvPr id="19" name="矢印: 左右 18">
-              <a:extLst>
-                <a:ext uri="{FF2B5EF4-FFF2-40B4-BE49-F238E27FC236}">
-                  <a16:creationId xmlns:a16="http://schemas.microsoft.com/office/drawing/2014/main" id="{978B7956-8FC5-4AF0-BF63-36FB18CFA193}"/>
-                </a:ext>
-              </a:extLst>
-            </p:cNvPr>
-            <p:cNvSpPr/>
-            <p:nvPr/>
-          </p:nvSpPr>
-          <p:spPr>
-            <a:xfrm>
-              <a:off x="3124653" y="5310626"/>
-              <a:ext cx="2260478" cy="583090"/>
-            </a:xfrm>
-            <a:prstGeom prst="leftRightArrow">
-              <a:avLst/>
-            </a:prstGeom>
-          </p:spPr>
-          <p:style>
-            <a:lnRef idx="2">
-              <a:schemeClr val="accent1">
-                <a:shade val="50000"/>
-              </a:schemeClr>
-            </a:lnRef>
-            <a:fillRef idx="1">
-              <a:schemeClr val="accent1"/>
-            </a:fillRef>
-            <a:effectRef idx="0">
-              <a:schemeClr val="accent1"/>
-            </a:effectRef>
-            <a:fontRef idx="minor">
-              <a:schemeClr val="lt1"/>
-            </a:fontRef>
-          </p:style>
-          <p:txBody>
-            <a:bodyPr rtlCol="0" anchor="ctr"/>
-            <a:lstStyle/>
-            <a:p>
-              <a:pPr algn="ctr"/>
-              <a:r>
-                <a:rPr kumimoji="1" lang="ja-JP" altLang="en-US" b="1" dirty="0"/>
-                <a:t>データ</a:t>
-              </a:r>
-            </a:p>
-          </p:txBody>
-        </p:sp>
-      </p:grpSp>
+        </p:nvPicPr>
+        <p:blipFill>
+          <a:blip r:embed="rId2"/>
+          <a:stretch>
+            <a:fillRect/>
+          </a:stretch>
+        </p:blipFill>
+        <p:spPr>
+          <a:xfrm>
+            <a:off x="567542" y="2187126"/>
+            <a:ext cx="7030431" cy="4420217"/>
+          </a:xfrm>
+          <a:prstGeom prst="rect">
+            <a:avLst/>
+          </a:prstGeom>
+        </p:spPr>
+      </p:pic>
     </p:spTree>
     <p:extLst>
       <p:ext uri="{BB962C8B-B14F-4D97-AF65-F5344CB8AC3E}">
-        <p14:creationId xmlns:p14="http://schemas.microsoft.com/office/powerpoint/2010/main" val="3292528400"/>
+        <p14:creationId xmlns:p14="http://schemas.microsoft.com/office/powerpoint/2010/main" val="2798507890"/>
       </p:ext>
     </p:extLst>
   </p:cSld>
@@ -5788,7 +4630,7 @@
         <p:spPr>
           <a:xfrm>
             <a:off x="567542" y="491954"/>
-            <a:ext cx="6046848" cy="584775"/>
+            <a:ext cx="5501827" cy="584775"/>
           </a:xfrm>
           <a:prstGeom prst="rect">
             <a:avLst/>
@@ -5803,7 +4645,15 @@
           <a:p>
             <a:r>
               <a:rPr kumimoji="1" lang="ja-JP" altLang="en-US" sz="3200" b="1" u="sng" dirty="0"/>
-              <a:t>通信方式 クライアントサーバー</a:t>
+              <a:t>チャットプログラム（</a:t>
+            </a:r>
+            <a:r>
+              <a:rPr kumimoji="1" lang="en-US" altLang="ja-JP" sz="3200" b="1" u="sng" dirty="0"/>
+              <a:t>P2P</a:t>
+            </a:r>
+            <a:r>
+              <a:rPr kumimoji="1" lang="ja-JP" altLang="en-US" sz="3200" b="1" u="sng" dirty="0"/>
+              <a:t>）</a:t>
             </a:r>
           </a:p>
         </p:txBody>
@@ -5823,7 +4673,7 @@
         <p:spPr>
           <a:xfrm>
             <a:off x="567542" y="1216429"/>
-            <a:ext cx="10865475" cy="5262979"/>
+            <a:ext cx="8494633" cy="830997"/>
           </a:xfrm>
           <a:prstGeom prst="rect">
             <a:avLst/>
@@ -5837,22 +4687,32 @@
           <a:lstStyle/>
           <a:p>
             <a:r>
-              <a:rPr kumimoji="1" lang="ja-JP" altLang="en-US" sz="2400" dirty="0"/>
-              <a:t>クライアントサーバー方式のメリットとデメリットです</a:t>
-            </a:r>
-            <a:endParaRPr kumimoji="1" lang="en-US" altLang="ja-JP" sz="2400" dirty="0"/>
-          </a:p>
-          <a:p>
-            <a:endParaRPr kumimoji="1" lang="en-US" altLang="ja-JP" sz="2400" dirty="0"/>
-          </a:p>
-          <a:p>
+              <a:rPr lang="ja-JP" altLang="en-US" sz="2400" dirty="0"/>
+              <a:t>クライアント側を作成します</a:t>
+            </a:r>
             <a:r>
               <a:rPr lang="ja-JP" altLang="en-US" sz="2400" b="1" dirty="0">
                 <a:solidFill>
                   <a:srgbClr val="FF0000"/>
                 </a:solidFill>
               </a:rPr>
-              <a:t>■メリット</a:t>
+              <a:t>（</a:t>
+            </a:r>
+            <a:r>
+              <a:rPr lang="en-US" altLang="ja-JP" sz="2400" b="1" dirty="0">
+                <a:solidFill>
+                  <a:srgbClr val="FF0000"/>
+                </a:solidFill>
+              </a:rPr>
+              <a:t>Client.cpp</a:t>
+            </a:r>
+            <a:r>
+              <a:rPr lang="ja-JP" altLang="en-US" sz="2400" b="1" dirty="0">
+                <a:solidFill>
+                  <a:srgbClr val="FF0000"/>
+                </a:solidFill>
+              </a:rPr>
+              <a:t>）</a:t>
             </a:r>
             <a:endParaRPr lang="en-US" altLang="ja-JP" sz="2400" b="1" dirty="0">
               <a:solidFill>
@@ -5862,127 +4722,47 @@
           </a:p>
           <a:p>
             <a:r>
-              <a:rPr kumimoji="1" lang="ja-JP" altLang="en-US" sz="2400" dirty="0"/>
-              <a:t>・</a:t>
-            </a:r>
-            <a:r>
               <a:rPr lang="ja-JP" altLang="en-US" sz="2400" dirty="0"/>
-              <a:t>常に正しい情報がサーバーにある</a:t>
-            </a:r>
-            <a:endParaRPr kumimoji="1" lang="en-US" altLang="ja-JP" sz="2400" dirty="0"/>
-          </a:p>
-          <a:p>
-            <a:r>
-              <a:rPr lang="ja-JP" altLang="en-US" sz="2400" dirty="0"/>
-              <a:t>　・同期ずれのリスクが低い</a:t>
+              <a:t>クライアント側は、既に存在しているホストに接続します。</a:t>
             </a:r>
             <a:endParaRPr lang="en-US" altLang="ja-JP" sz="2400" dirty="0"/>
           </a:p>
-          <a:p>
-            <a:r>
-              <a:rPr kumimoji="1" lang="ja-JP" altLang="en-US" sz="2400" dirty="0"/>
-              <a:t>　・クライアント側のチートをサーバーで検知できる</a:t>
-            </a:r>
-            <a:endParaRPr kumimoji="1" lang="en-US" altLang="ja-JP" sz="2400" dirty="0"/>
-          </a:p>
-          <a:p>
-            <a:r>
-              <a:rPr lang="ja-JP" altLang="en-US" sz="2400" dirty="0"/>
-              <a:t>　・データを集計することができる</a:t>
-            </a:r>
-            <a:endParaRPr lang="en-US" altLang="ja-JP" sz="2400" dirty="0"/>
-          </a:p>
-          <a:p>
-            <a:r>
-              <a:rPr kumimoji="1" lang="ja-JP" altLang="en-US" sz="2400" dirty="0"/>
-              <a:t>　・複数クライアントの対応が簡単</a:t>
-            </a:r>
-            <a:endParaRPr kumimoji="1" lang="en-US" altLang="ja-JP" sz="2400" dirty="0"/>
-          </a:p>
-          <a:p>
-            <a:endParaRPr kumimoji="1" lang="en-US" altLang="ja-JP" sz="2400" dirty="0"/>
-          </a:p>
-          <a:p>
-            <a:r>
-              <a:rPr lang="ja-JP" altLang="en-US" sz="2400" b="1" dirty="0">
-                <a:solidFill>
-                  <a:srgbClr val="0070C0"/>
-                </a:solidFill>
-              </a:rPr>
-              <a:t>■デメリット</a:t>
-            </a:r>
-            <a:endParaRPr lang="en-US" altLang="ja-JP" sz="2400" b="1" dirty="0">
-              <a:solidFill>
-                <a:srgbClr val="0070C0"/>
-              </a:solidFill>
-            </a:endParaRPr>
-          </a:p>
-          <a:p>
-            <a:r>
-              <a:rPr lang="ja-JP" altLang="en-US" sz="2400" dirty="0"/>
-              <a:t>・サーバー側の開発と、クライアント、サーバー間の連携が必要（</a:t>
-            </a:r>
-            <a:r>
-              <a:rPr lang="en-US" altLang="ja-JP" sz="2400" b="1" dirty="0">
-                <a:solidFill>
-                  <a:srgbClr val="FF0000"/>
-                </a:solidFill>
-              </a:rPr>
-              <a:t>API</a:t>
-            </a:r>
-            <a:r>
-              <a:rPr lang="ja-JP" altLang="en-US" sz="2400" b="1" dirty="0">
-                <a:solidFill>
-                  <a:srgbClr val="FF0000"/>
-                </a:solidFill>
-              </a:rPr>
-              <a:t>開発</a:t>
-            </a:r>
-            <a:r>
-              <a:rPr lang="ja-JP" altLang="en-US" sz="2400" dirty="0"/>
-              <a:t>）</a:t>
-            </a:r>
-            <a:endParaRPr lang="en-US" altLang="ja-JP" sz="2400" dirty="0"/>
-          </a:p>
-          <a:p>
-            <a:r>
-              <a:rPr lang="ja-JP" altLang="en-US" sz="2400" dirty="0"/>
-              <a:t>・サーバーを経由するため通信が遅い（</a:t>
-            </a:r>
-            <a:r>
-              <a:rPr lang="ja-JP" altLang="en-US" sz="2400" b="1" dirty="0">
-                <a:solidFill>
-                  <a:srgbClr val="FF0000"/>
-                </a:solidFill>
-              </a:rPr>
-              <a:t>レイテンシ問題</a:t>
-            </a:r>
-            <a:r>
-              <a:rPr lang="ja-JP" altLang="en-US" sz="2400" dirty="0"/>
-              <a:t>）</a:t>
-            </a:r>
-            <a:endParaRPr lang="en-US" altLang="ja-JP" sz="2400" dirty="0"/>
-          </a:p>
-          <a:p>
-            <a:r>
-              <a:rPr lang="ja-JP" altLang="en-US" sz="2400" dirty="0"/>
-              <a:t>・サーバーに問題が発生すると全クライアントが使用できなくなる</a:t>
-            </a:r>
-            <a:endParaRPr lang="en-US" altLang="ja-JP" sz="2400" dirty="0"/>
-          </a:p>
-          <a:p>
-            <a:r>
-              <a:rPr lang="ja-JP" altLang="en-US" sz="2400" dirty="0"/>
-              <a:t>・デバッグが大変（クライアント側？サーバー側？）</a:t>
-            </a:r>
-            <a:endParaRPr lang="en-US" altLang="ja-JP" sz="2400" dirty="0"/>
-          </a:p>
-        </p:txBody>
-      </p:sp>
+        </p:txBody>
+      </p:sp>
+      <p:pic>
+        <p:nvPicPr>
+          <p:cNvPr id="3" name="図 2">
+            <a:extLst>
+              <a:ext uri="{FF2B5EF4-FFF2-40B4-BE49-F238E27FC236}">
+                <a16:creationId xmlns:a16="http://schemas.microsoft.com/office/drawing/2014/main" id="{9F4EF5A3-19FC-4AFD-AFB0-752F44CCA262}"/>
+              </a:ext>
+            </a:extLst>
+          </p:cNvPr>
+          <p:cNvPicPr>
+            <a:picLocks noChangeAspect="1"/>
+          </p:cNvPicPr>
+          <p:nvPr/>
+        </p:nvPicPr>
+        <p:blipFill>
+          <a:blip r:embed="rId2"/>
+          <a:stretch>
+            <a:fillRect/>
+          </a:stretch>
+        </p:blipFill>
+        <p:spPr>
+          <a:xfrm>
+            <a:off x="567542" y="2187126"/>
+            <a:ext cx="6864199" cy="4195742"/>
+          </a:xfrm>
+          <a:prstGeom prst="rect">
+            <a:avLst/>
+          </a:prstGeom>
+        </p:spPr>
+      </p:pic>
     </p:spTree>
     <p:extLst>
       <p:ext uri="{BB962C8B-B14F-4D97-AF65-F5344CB8AC3E}">
-        <p14:creationId xmlns:p14="http://schemas.microsoft.com/office/powerpoint/2010/main" val="1793864305"/>
+        <p14:creationId xmlns:p14="http://schemas.microsoft.com/office/powerpoint/2010/main" val="4264883763"/>
       </p:ext>
     </p:extLst>
   </p:cSld>
@@ -6024,7 +4804,7 @@
         <p:spPr>
           <a:xfrm>
             <a:off x="567542" y="491954"/>
-            <a:ext cx="2746265" cy="584775"/>
+            <a:ext cx="5501827" cy="584775"/>
           </a:xfrm>
           <a:prstGeom prst="rect">
             <a:avLst/>
@@ -6039,13 +4819,16 @@
           <a:p>
             <a:r>
               <a:rPr kumimoji="1" lang="ja-JP" altLang="en-US" sz="3200" b="1" u="sng" dirty="0"/>
-              <a:t>通信方式 </a:t>
+              <a:t>チャットプログラム（</a:t>
             </a:r>
             <a:r>
               <a:rPr kumimoji="1" lang="en-US" altLang="ja-JP" sz="3200" b="1" u="sng" dirty="0"/>
               <a:t>P2P</a:t>
             </a:r>
-            <a:endParaRPr kumimoji="1" lang="ja-JP" altLang="en-US" sz="3200" b="1" u="sng" dirty="0"/>
+            <a:r>
+              <a:rPr kumimoji="1" lang="ja-JP" altLang="en-US" sz="3200" b="1" u="sng" dirty="0"/>
+              <a:t>）</a:t>
+            </a:r>
           </a:p>
         </p:txBody>
       </p:sp>
@@ -6064,7 +4847,7 @@
         <p:spPr>
           <a:xfrm>
             <a:off x="567542" y="1216429"/>
-            <a:ext cx="10033516" cy="2677656"/>
+            <a:ext cx="6647974" cy="461665"/>
           </a:xfrm>
           <a:prstGeom prst="rect">
             <a:avLst/>
@@ -6079,74 +4862,512 @@
           <a:p>
             <a:r>
               <a:rPr lang="ja-JP" altLang="en-US" sz="2400" dirty="0"/>
-              <a:t>今回紹介したのは基礎的な方式です。</a:t>
+              <a:t>接続が完了するまで待機する処理も必要です。</a:t>
             </a:r>
             <a:endParaRPr lang="en-US" altLang="ja-JP" sz="2400" dirty="0"/>
           </a:p>
-          <a:p>
-            <a:r>
-              <a:rPr lang="ja-JP" altLang="en-US" sz="2400" dirty="0"/>
-              <a:t>もしも興味がありましたら、これらから派生した以下の方式についても</a:t>
-            </a:r>
-            <a:endParaRPr lang="en-US" altLang="ja-JP" sz="2400" dirty="0"/>
-          </a:p>
-          <a:p>
-            <a:r>
-              <a:rPr lang="ja-JP" altLang="en-US" sz="2400" dirty="0"/>
-              <a:t>調べてみましょう。</a:t>
-            </a:r>
-            <a:endParaRPr lang="en-US" altLang="ja-JP" sz="2400" dirty="0"/>
-          </a:p>
-          <a:p>
-            <a:endParaRPr lang="en-US" altLang="ja-JP" sz="2400" dirty="0"/>
-          </a:p>
-          <a:p>
-            <a:r>
-              <a:rPr lang="ja-JP" altLang="en-US" sz="2400" dirty="0"/>
-              <a:t>・デディケートサーバー方式（</a:t>
-            </a:r>
-            <a:r>
-              <a:rPr lang="en-US" altLang="ja-JP" sz="2400" dirty="0"/>
-              <a:t>MMO</a:t>
-            </a:r>
-            <a:r>
-              <a:rPr lang="ja-JP" altLang="en-US" sz="2400" dirty="0"/>
-              <a:t>系）</a:t>
-            </a:r>
-            <a:endParaRPr lang="en-US" altLang="ja-JP" sz="2400" dirty="0"/>
-          </a:p>
-          <a:p>
-            <a:r>
-              <a:rPr lang="ja-JP" altLang="en-US" sz="2400" dirty="0"/>
-              <a:t>・</a:t>
-            </a:r>
-            <a:r>
-              <a:rPr lang="en-US" altLang="ja-JP" sz="2400" dirty="0"/>
-              <a:t>Listen</a:t>
-            </a:r>
-            <a:r>
-              <a:rPr lang="ja-JP" altLang="en-US" sz="2400" dirty="0"/>
-              <a:t>サーバー方式（モンハンなど少人数協力系）</a:t>
-            </a:r>
-            <a:endParaRPr lang="en-US" altLang="ja-JP" sz="2400" dirty="0"/>
-          </a:p>
-          <a:p>
-            <a:r>
-              <a:rPr lang="en-US" altLang="ja-JP" sz="2400" dirty="0"/>
-              <a:t>※</a:t>
-            </a:r>
-            <a:r>
-              <a:rPr lang="ja-JP" altLang="en-US" sz="2400" dirty="0"/>
-              <a:t>ほかにもいろいろあります</a:t>
-            </a:r>
-            <a:endParaRPr lang="en-US" altLang="ja-JP" sz="2400" dirty="0"/>
-          </a:p>
-        </p:txBody>
-      </p:sp>
+        </p:txBody>
+      </p:sp>
+      <p:pic>
+        <p:nvPicPr>
+          <p:cNvPr id="5" name="図 4">
+            <a:extLst>
+              <a:ext uri="{FF2B5EF4-FFF2-40B4-BE49-F238E27FC236}">
+                <a16:creationId xmlns:a16="http://schemas.microsoft.com/office/drawing/2014/main" id="{91982D3B-79D2-4C02-A956-005AD218FDF0}"/>
+              </a:ext>
+            </a:extLst>
+          </p:cNvPr>
+          <p:cNvPicPr>
+            <a:picLocks noChangeAspect="1"/>
+          </p:cNvPicPr>
+          <p:nvPr/>
+        </p:nvPicPr>
+        <p:blipFill>
+          <a:blip r:embed="rId2"/>
+          <a:stretch>
+            <a:fillRect/>
+          </a:stretch>
+        </p:blipFill>
+        <p:spPr>
+          <a:xfrm>
+            <a:off x="567542" y="1817793"/>
+            <a:ext cx="7151070" cy="4164055"/>
+          </a:xfrm>
+          <a:prstGeom prst="rect">
+            <a:avLst/>
+          </a:prstGeom>
+        </p:spPr>
+      </p:pic>
     </p:spTree>
     <p:extLst>
       <p:ext uri="{BB962C8B-B14F-4D97-AF65-F5344CB8AC3E}">
-        <p14:creationId xmlns:p14="http://schemas.microsoft.com/office/powerpoint/2010/main" val="503993105"/>
+        <p14:creationId xmlns:p14="http://schemas.microsoft.com/office/powerpoint/2010/main" val="3962005509"/>
+      </p:ext>
+    </p:extLst>
+  </p:cSld>
+  <p:clrMapOvr>
+    <a:masterClrMapping/>
+  </p:clrMapOvr>
+</p:sld>
+</file>
+
+<file path=ppt/slides/slide8.xml><?xml version="1.0" encoding="utf-8"?>
+<p:sld xmlns:a="http://schemas.openxmlformats.org/drawingml/2006/main" xmlns:r="http://schemas.openxmlformats.org/officeDocument/2006/relationships" xmlns:p="http://schemas.openxmlformats.org/presentationml/2006/main">
+  <p:cSld>
+    <p:spTree>
+      <p:nvGrpSpPr>
+        <p:cNvPr id="1" name=""/>
+        <p:cNvGrpSpPr/>
+        <p:nvPr/>
+      </p:nvGrpSpPr>
+      <p:grpSpPr>
+        <a:xfrm>
+          <a:off x="0" y="0"/>
+          <a:ext cx="0" cy="0"/>
+          <a:chOff x="0" y="0"/>
+          <a:chExt cx="0" cy="0"/>
+        </a:xfrm>
+      </p:grpSpPr>
+      <p:sp>
+        <p:nvSpPr>
+          <p:cNvPr id="4" name="テキスト ボックス 3">
+            <a:extLst>
+              <a:ext uri="{FF2B5EF4-FFF2-40B4-BE49-F238E27FC236}">
+                <a16:creationId xmlns:a16="http://schemas.microsoft.com/office/drawing/2014/main" id="{5A13BF46-B8C5-48AA-8308-C9ECFF431A18}"/>
+              </a:ext>
+            </a:extLst>
+          </p:cNvPr>
+          <p:cNvSpPr txBox="1"/>
+          <p:nvPr/>
+        </p:nvSpPr>
+        <p:spPr>
+          <a:xfrm>
+            <a:off x="567542" y="491954"/>
+            <a:ext cx="5501827" cy="584775"/>
+          </a:xfrm>
+          <a:prstGeom prst="rect">
+            <a:avLst/>
+          </a:prstGeom>
+          <a:noFill/>
+        </p:spPr>
+        <p:txBody>
+          <a:bodyPr wrap="none" rtlCol="0">
+            <a:spAutoFit/>
+          </a:bodyPr>
+          <a:lstStyle/>
+          <a:p>
+            <a:r>
+              <a:rPr kumimoji="1" lang="ja-JP" altLang="en-US" sz="3200" b="1" u="sng" dirty="0"/>
+              <a:t>チャットプログラム（</a:t>
+            </a:r>
+            <a:r>
+              <a:rPr kumimoji="1" lang="en-US" altLang="ja-JP" sz="3200" b="1" u="sng" dirty="0"/>
+              <a:t>P2P</a:t>
+            </a:r>
+            <a:r>
+              <a:rPr kumimoji="1" lang="ja-JP" altLang="en-US" sz="3200" b="1" u="sng" dirty="0"/>
+              <a:t>）</a:t>
+            </a:r>
+          </a:p>
+        </p:txBody>
+      </p:sp>
+      <p:sp>
+        <p:nvSpPr>
+          <p:cNvPr id="6" name="テキスト ボックス 5">
+            <a:extLst>
+              <a:ext uri="{FF2B5EF4-FFF2-40B4-BE49-F238E27FC236}">
+                <a16:creationId xmlns:a16="http://schemas.microsoft.com/office/drawing/2014/main" id="{55830AD6-028B-4C4E-80BF-B70DFC1C3A46}"/>
+              </a:ext>
+            </a:extLst>
+          </p:cNvPr>
+          <p:cNvSpPr txBox="1"/>
+          <p:nvPr/>
+        </p:nvSpPr>
+        <p:spPr>
+          <a:xfrm>
+            <a:off x="567542" y="1216429"/>
+            <a:ext cx="8802410" cy="830997"/>
+          </a:xfrm>
+          <a:prstGeom prst="rect">
+            <a:avLst/>
+          </a:prstGeom>
+          <a:noFill/>
+        </p:spPr>
+        <p:txBody>
+          <a:bodyPr wrap="none" rtlCol="0">
+            <a:spAutoFit/>
+          </a:bodyPr>
+          <a:lstStyle/>
+          <a:p>
+            <a:r>
+              <a:rPr lang="ja-JP" altLang="en-US" sz="2400" dirty="0"/>
+              <a:t>動作確認をしてみましょう。</a:t>
+            </a:r>
+            <a:endParaRPr lang="en-US" altLang="ja-JP" sz="2400" dirty="0"/>
+          </a:p>
+          <a:p>
+            <a:r>
+              <a:rPr lang="ja-JP" altLang="en-US" sz="2400" dirty="0"/>
+              <a:t>ホストから用意しないと通信できないので気を付けましょう。</a:t>
+            </a:r>
+            <a:endParaRPr lang="en-US" altLang="ja-JP" sz="2400" dirty="0"/>
+          </a:p>
+        </p:txBody>
+      </p:sp>
+      <p:pic>
+        <p:nvPicPr>
+          <p:cNvPr id="7" name="図 6">
+            <a:extLst>
+              <a:ext uri="{FF2B5EF4-FFF2-40B4-BE49-F238E27FC236}">
+                <a16:creationId xmlns:a16="http://schemas.microsoft.com/office/drawing/2014/main" id="{B1EBD5FF-A5E1-471E-9A57-568292CD55F5}"/>
+              </a:ext>
+            </a:extLst>
+          </p:cNvPr>
+          <p:cNvPicPr>
+            <a:picLocks noChangeAspect="1"/>
+          </p:cNvPicPr>
+          <p:nvPr/>
+        </p:nvPicPr>
+        <p:blipFill>
+          <a:blip r:embed="rId2"/>
+          <a:stretch>
+            <a:fillRect/>
+          </a:stretch>
+        </p:blipFill>
+        <p:spPr>
+          <a:xfrm>
+            <a:off x="5811618" y="2187126"/>
+            <a:ext cx="2991723" cy="2178641"/>
+          </a:xfrm>
+          <a:prstGeom prst="rect">
+            <a:avLst/>
+          </a:prstGeom>
+        </p:spPr>
+      </p:pic>
+      <p:pic>
+        <p:nvPicPr>
+          <p:cNvPr id="8" name="図 7">
+            <a:extLst>
+              <a:ext uri="{FF2B5EF4-FFF2-40B4-BE49-F238E27FC236}">
+                <a16:creationId xmlns:a16="http://schemas.microsoft.com/office/drawing/2014/main" id="{03FBEE85-2789-4A1D-9566-A82F8AE87E99}"/>
+              </a:ext>
+            </a:extLst>
+          </p:cNvPr>
+          <p:cNvPicPr>
+            <a:picLocks noChangeAspect="1"/>
+          </p:cNvPicPr>
+          <p:nvPr/>
+        </p:nvPicPr>
+        <p:blipFill>
+          <a:blip r:embed="rId3"/>
+          <a:stretch>
+            <a:fillRect/>
+          </a:stretch>
+        </p:blipFill>
+        <p:spPr>
+          <a:xfrm>
+            <a:off x="567542" y="2269785"/>
+            <a:ext cx="2686425" cy="2095792"/>
+          </a:xfrm>
+          <a:prstGeom prst="rect">
+            <a:avLst/>
+          </a:prstGeom>
+        </p:spPr>
+      </p:pic>
+      <p:sp>
+        <p:nvSpPr>
+          <p:cNvPr id="9" name="矢印: 左右 8">
+            <a:extLst>
+              <a:ext uri="{FF2B5EF4-FFF2-40B4-BE49-F238E27FC236}">
+                <a16:creationId xmlns:a16="http://schemas.microsoft.com/office/drawing/2014/main" id="{C1EC9F63-DB19-4466-A801-098C6E626FB8}"/>
+              </a:ext>
+            </a:extLst>
+          </p:cNvPr>
+          <p:cNvSpPr/>
+          <p:nvPr/>
+        </p:nvSpPr>
+        <p:spPr>
+          <a:xfrm>
+            <a:off x="3390148" y="3012508"/>
+            <a:ext cx="2260478" cy="583090"/>
+          </a:xfrm>
+          <a:prstGeom prst="leftRightArrow">
+            <a:avLst/>
+          </a:prstGeom>
+        </p:spPr>
+        <p:style>
+          <a:lnRef idx="2">
+            <a:schemeClr val="accent1">
+              <a:shade val="50000"/>
+            </a:schemeClr>
+          </a:lnRef>
+          <a:fillRef idx="1">
+            <a:schemeClr val="accent1"/>
+          </a:fillRef>
+          <a:effectRef idx="0">
+            <a:schemeClr val="accent1"/>
+          </a:effectRef>
+          <a:fontRef idx="minor">
+            <a:schemeClr val="lt1"/>
+          </a:fontRef>
+        </p:style>
+        <p:txBody>
+          <a:bodyPr rtlCol="0" anchor="ctr"/>
+          <a:lstStyle/>
+          <a:p>
+            <a:pPr algn="ctr"/>
+            <a:endParaRPr kumimoji="1" lang="ja-JP" altLang="en-US" b="1" dirty="0"/>
+          </a:p>
+        </p:txBody>
+      </p:sp>
+      <p:sp>
+        <p:nvSpPr>
+          <p:cNvPr id="10" name="テキスト ボックス 9">
+            <a:extLst>
+              <a:ext uri="{FF2B5EF4-FFF2-40B4-BE49-F238E27FC236}">
+                <a16:creationId xmlns:a16="http://schemas.microsoft.com/office/drawing/2014/main" id="{07EE58A2-1F8C-4C13-8600-84AB31B570BF}"/>
+              </a:ext>
+            </a:extLst>
+          </p:cNvPr>
+          <p:cNvSpPr txBox="1"/>
+          <p:nvPr/>
+        </p:nvSpPr>
+        <p:spPr>
+          <a:xfrm>
+            <a:off x="567542" y="4587936"/>
+            <a:ext cx="4185761" cy="830997"/>
+          </a:xfrm>
+          <a:prstGeom prst="rect">
+            <a:avLst/>
+          </a:prstGeom>
+          <a:noFill/>
+        </p:spPr>
+        <p:txBody>
+          <a:bodyPr wrap="none" rtlCol="0">
+            <a:spAutoFit/>
+          </a:bodyPr>
+          <a:lstStyle/>
+          <a:p>
+            <a:r>
+              <a:rPr lang="en-US" altLang="ja-JP" sz="2400" b="1" dirty="0">
+                <a:solidFill>
+                  <a:srgbClr val="00B050"/>
+                </a:solidFill>
+              </a:rPr>
+              <a:t>MEMO</a:t>
+            </a:r>
+          </a:p>
+          <a:p>
+            <a:r>
+              <a:rPr lang="ja-JP" altLang="en-US" sz="2400" dirty="0"/>
+              <a:t>他の座席の人と繋いでみよう</a:t>
+            </a:r>
+            <a:endParaRPr lang="en-US" altLang="ja-JP" sz="2400" dirty="0"/>
+          </a:p>
+        </p:txBody>
+      </p:sp>
+    </p:spTree>
+    <p:extLst>
+      <p:ext uri="{BB962C8B-B14F-4D97-AF65-F5344CB8AC3E}">
+        <p14:creationId xmlns:p14="http://schemas.microsoft.com/office/powerpoint/2010/main" val="4223834471"/>
+      </p:ext>
+    </p:extLst>
+  </p:cSld>
+  <p:clrMapOvr>
+    <a:masterClrMapping/>
+  </p:clrMapOvr>
+</p:sld>
+</file>
+
+<file path=ppt/slides/slide9.xml><?xml version="1.0" encoding="utf-8"?>
+<p:sld xmlns:a="http://schemas.openxmlformats.org/drawingml/2006/main" xmlns:r="http://schemas.openxmlformats.org/officeDocument/2006/relationships" xmlns:p="http://schemas.openxmlformats.org/presentationml/2006/main">
+  <p:cSld>
+    <p:spTree>
+      <p:nvGrpSpPr>
+        <p:cNvPr id="1" name=""/>
+        <p:cNvGrpSpPr/>
+        <p:nvPr/>
+      </p:nvGrpSpPr>
+      <p:grpSpPr>
+        <a:xfrm>
+          <a:off x="0" y="0"/>
+          <a:ext cx="0" cy="0"/>
+          <a:chOff x="0" y="0"/>
+          <a:chExt cx="0" cy="0"/>
+        </a:xfrm>
+      </p:grpSpPr>
+      <p:sp>
+        <p:nvSpPr>
+          <p:cNvPr id="4" name="テキスト ボックス 3">
+            <a:extLst>
+              <a:ext uri="{FF2B5EF4-FFF2-40B4-BE49-F238E27FC236}">
+                <a16:creationId xmlns:a16="http://schemas.microsoft.com/office/drawing/2014/main" id="{5A13BF46-B8C5-48AA-8308-C9ECFF431A18}"/>
+              </a:ext>
+            </a:extLst>
+          </p:cNvPr>
+          <p:cNvSpPr txBox="1"/>
+          <p:nvPr/>
+        </p:nvSpPr>
+        <p:spPr>
+          <a:xfrm>
+            <a:off x="567542" y="491954"/>
+            <a:ext cx="6439583" cy="584775"/>
+          </a:xfrm>
+          <a:prstGeom prst="rect">
+            <a:avLst/>
+          </a:prstGeom>
+          <a:noFill/>
+        </p:spPr>
+        <p:txBody>
+          <a:bodyPr wrap="none" rtlCol="0">
+            <a:spAutoFit/>
+          </a:bodyPr>
+          <a:lstStyle/>
+          <a:p>
+            <a:r>
+              <a:rPr kumimoji="1" lang="ja-JP" altLang="en-US" sz="3200" b="1" u="sng" dirty="0"/>
+              <a:t>チャットプログラム（</a:t>
+            </a:r>
+            <a:r>
+              <a:rPr kumimoji="1" lang="en-US" altLang="ja-JP" sz="3200" b="1" u="sng" dirty="0"/>
+              <a:t>P2P</a:t>
+            </a:r>
+            <a:r>
+              <a:rPr kumimoji="1" lang="ja-JP" altLang="en-US" sz="3200" b="1" u="sng" dirty="0"/>
+              <a:t>） 補足</a:t>
+            </a:r>
+          </a:p>
+        </p:txBody>
+      </p:sp>
+      <p:sp>
+        <p:nvSpPr>
+          <p:cNvPr id="6" name="テキスト ボックス 5">
+            <a:extLst>
+              <a:ext uri="{FF2B5EF4-FFF2-40B4-BE49-F238E27FC236}">
+                <a16:creationId xmlns:a16="http://schemas.microsoft.com/office/drawing/2014/main" id="{55830AD6-028B-4C4E-80BF-B70DFC1C3A46}"/>
+              </a:ext>
+            </a:extLst>
+          </p:cNvPr>
+          <p:cNvSpPr txBox="1"/>
+          <p:nvPr/>
+        </p:nvSpPr>
+        <p:spPr>
+          <a:xfrm>
+            <a:off x="567542" y="1216429"/>
+            <a:ext cx="8765541" cy="461665"/>
+          </a:xfrm>
+          <a:prstGeom prst="rect">
+            <a:avLst/>
+          </a:prstGeom>
+          <a:noFill/>
+        </p:spPr>
+        <p:txBody>
+          <a:bodyPr wrap="none" rtlCol="0">
+            <a:spAutoFit/>
+          </a:bodyPr>
+          <a:lstStyle/>
+          <a:p>
+            <a:r>
+              <a:rPr lang="en-US" altLang="ja-JP" sz="2400" dirty="0"/>
+              <a:t>P2P</a:t>
+            </a:r>
+            <a:r>
+              <a:rPr lang="ja-JP" altLang="en-US" sz="2400" dirty="0"/>
+              <a:t>の最大のメリットは</a:t>
+            </a:r>
+            <a:r>
+              <a:rPr lang="ja-JP" altLang="en-US" sz="2400" b="1" dirty="0">
+                <a:solidFill>
+                  <a:srgbClr val="FF0000"/>
+                </a:solidFill>
+              </a:rPr>
+              <a:t>送受信処理が共通で使える</a:t>
+            </a:r>
+            <a:r>
+              <a:rPr lang="ja-JP" altLang="en-US" sz="2400" dirty="0"/>
+              <a:t>ことです。</a:t>
+            </a:r>
+            <a:endParaRPr lang="en-US" altLang="ja-JP" sz="2400" dirty="0"/>
+          </a:p>
+        </p:txBody>
+      </p:sp>
+      <p:pic>
+        <p:nvPicPr>
+          <p:cNvPr id="3" name="図 2">
+            <a:extLst>
+              <a:ext uri="{FF2B5EF4-FFF2-40B4-BE49-F238E27FC236}">
+                <a16:creationId xmlns:a16="http://schemas.microsoft.com/office/drawing/2014/main" id="{84F5E4ED-B0CB-4ED9-9F8C-33975001EB42}"/>
+              </a:ext>
+            </a:extLst>
+          </p:cNvPr>
+          <p:cNvPicPr>
+            <a:picLocks noChangeAspect="1"/>
+          </p:cNvPicPr>
+          <p:nvPr/>
+        </p:nvPicPr>
+        <p:blipFill>
+          <a:blip r:embed="rId2"/>
+          <a:stretch>
+            <a:fillRect/>
+          </a:stretch>
+        </p:blipFill>
+        <p:spPr>
+          <a:xfrm>
+            <a:off x="567541" y="1817794"/>
+            <a:ext cx="6133929" cy="2377688"/>
+          </a:xfrm>
+          <a:prstGeom prst="rect">
+            <a:avLst/>
+          </a:prstGeom>
+        </p:spPr>
+      </p:pic>
+      <p:sp>
+        <p:nvSpPr>
+          <p:cNvPr id="10" name="テキスト ボックス 9">
+            <a:extLst>
+              <a:ext uri="{FF2B5EF4-FFF2-40B4-BE49-F238E27FC236}">
+                <a16:creationId xmlns:a16="http://schemas.microsoft.com/office/drawing/2014/main" id="{E3B394EF-A348-4541-9839-F6123961EC1C}"/>
+              </a:ext>
+            </a:extLst>
+          </p:cNvPr>
+          <p:cNvSpPr txBox="1"/>
+          <p:nvPr/>
+        </p:nvSpPr>
+        <p:spPr>
+          <a:xfrm>
+            <a:off x="567542" y="4336876"/>
+            <a:ext cx="4493538" cy="830997"/>
+          </a:xfrm>
+          <a:prstGeom prst="rect">
+            <a:avLst/>
+          </a:prstGeom>
+          <a:noFill/>
+        </p:spPr>
+        <p:txBody>
+          <a:bodyPr wrap="none" rtlCol="0">
+            <a:spAutoFit/>
+          </a:bodyPr>
+          <a:lstStyle/>
+          <a:p>
+            <a:r>
+              <a:rPr lang="ja-JP" altLang="en-US" sz="2400" dirty="0"/>
+              <a:t>安全なコードで実装できます。</a:t>
+            </a:r>
+            <a:endParaRPr lang="en-US" altLang="ja-JP" sz="2400" dirty="0"/>
+          </a:p>
+          <a:p>
+            <a:r>
+              <a:rPr lang="ja-JP" altLang="en-US" sz="2400" dirty="0"/>
+              <a:t>デバッグも簡単です。</a:t>
+            </a:r>
+            <a:endParaRPr lang="en-US" altLang="ja-JP" sz="2400" dirty="0"/>
+          </a:p>
+        </p:txBody>
+      </p:sp>
+    </p:spTree>
+    <p:extLst>
+      <p:ext uri="{BB962C8B-B14F-4D97-AF65-F5344CB8AC3E}">
+        <p14:creationId xmlns:p14="http://schemas.microsoft.com/office/powerpoint/2010/main" val="2562032707"/>
       </p:ext>
     </p:extLst>
   </p:cSld>
